--- a/In to the storm.pptx
+++ b/In to the storm.pptx
@@ -7,13 +7,14 @@
   <p:sldIdLst>
     <p:sldId id="256" r:id="rId2"/>
     <p:sldId id="257" r:id="rId3"/>
-    <p:sldId id="258" r:id="rId4"/>
-    <p:sldId id="259" r:id="rId5"/>
+    <p:sldId id="259" r:id="rId4"/>
+    <p:sldId id="267" r:id="rId5"/>
     <p:sldId id="260" r:id="rId6"/>
     <p:sldId id="261" r:id="rId7"/>
     <p:sldId id="263" r:id="rId8"/>
     <p:sldId id="264" r:id="rId9"/>
     <p:sldId id="266" r:id="rId10"/>
+    <p:sldId id="258" r:id="rId11"/>
   </p:sldIdLst>
   <p:sldSz cx="9144000" cy="6858000" type="screen4x3"/>
   <p:notesSz cx="6858000" cy="9144000"/>
@@ -226,7 +227,7 @@
           <a:p>
             <a:fld id="{20DE8C6E-7A4C-4208-9FDD-A2E28AE44E51}" type="datetimeFigureOut">
               <a:rPr lang="en-US" smtClean="0"/>
-              <a:t>10/7/2022</a:t>
+              <a:t>10/12/2022</a:t>
             </a:fld>
             <a:endParaRPr lang="en-US"/>
           </a:p>
@@ -452,7 +453,7 @@
           <a:p>
             <a:fld id="{20DE8C6E-7A4C-4208-9FDD-A2E28AE44E51}" type="datetimeFigureOut">
               <a:rPr lang="en-US" smtClean="0"/>
-              <a:t>10/7/2022</a:t>
+              <a:t>10/12/2022</a:t>
             </a:fld>
             <a:endParaRPr lang="en-US"/>
           </a:p>
@@ -627,7 +628,7 @@
           <a:p>
             <a:fld id="{20DE8C6E-7A4C-4208-9FDD-A2E28AE44E51}" type="datetimeFigureOut">
               <a:rPr lang="en-US" smtClean="0"/>
-              <a:t>10/7/2022</a:t>
+              <a:t>10/12/2022</a:t>
             </a:fld>
             <a:endParaRPr lang="en-US"/>
           </a:p>
@@ -792,7 +793,7 @@
           <a:p>
             <a:fld id="{20DE8C6E-7A4C-4208-9FDD-A2E28AE44E51}" type="datetimeFigureOut">
               <a:rPr lang="en-US" smtClean="0"/>
-              <a:t>10/7/2022</a:t>
+              <a:t>10/12/2022</a:t>
             </a:fld>
             <a:endParaRPr lang="en-US"/>
           </a:p>
@@ -1036,7 +1037,7 @@
           <a:p>
             <a:fld id="{20DE8C6E-7A4C-4208-9FDD-A2E28AE44E51}" type="datetimeFigureOut">
               <a:rPr lang="en-US" smtClean="0"/>
-              <a:t>10/7/2022</a:t>
+              <a:t>10/12/2022</a:t>
             </a:fld>
             <a:endParaRPr lang="en-US"/>
           </a:p>
@@ -1300,7 +1301,7 @@
           <a:p>
             <a:fld id="{20DE8C6E-7A4C-4208-9FDD-A2E28AE44E51}" type="datetimeFigureOut">
               <a:rPr lang="en-US" smtClean="0"/>
-              <a:t>10/7/2022</a:t>
+              <a:t>10/12/2022</a:t>
             </a:fld>
             <a:endParaRPr lang="en-US"/>
           </a:p>
@@ -1674,7 +1675,7 @@
           <a:p>
             <a:fld id="{20DE8C6E-7A4C-4208-9FDD-A2E28AE44E51}" type="datetimeFigureOut">
               <a:rPr lang="en-US" smtClean="0"/>
-              <a:t>10/7/2022</a:t>
+              <a:t>10/12/2022</a:t>
             </a:fld>
             <a:endParaRPr lang="en-US"/>
           </a:p>
@@ -1787,7 +1788,7 @@
           <a:p>
             <a:fld id="{20DE8C6E-7A4C-4208-9FDD-A2E28AE44E51}" type="datetimeFigureOut">
               <a:rPr lang="en-US" smtClean="0"/>
-              <a:t>10/7/2022</a:t>
+              <a:t>10/12/2022</a:t>
             </a:fld>
             <a:endParaRPr lang="en-US"/>
           </a:p>
@@ -1877,7 +1878,7 @@
           <a:p>
             <a:fld id="{20DE8C6E-7A4C-4208-9FDD-A2E28AE44E51}" type="datetimeFigureOut">
               <a:rPr lang="en-US" smtClean="0"/>
-              <a:t>10/7/2022</a:t>
+              <a:t>10/12/2022</a:t>
             </a:fld>
             <a:endParaRPr lang="en-US"/>
           </a:p>
@@ -2135,7 +2136,7 @@
           <a:p>
             <a:fld id="{20DE8C6E-7A4C-4208-9FDD-A2E28AE44E51}" type="datetimeFigureOut">
               <a:rPr lang="en-US" smtClean="0"/>
-              <a:t>10/7/2022</a:t>
+              <a:t>10/12/2022</a:t>
             </a:fld>
             <a:endParaRPr lang="en-US"/>
           </a:p>
@@ -2399,7 +2400,7 @@
           <a:p>
             <a:fld id="{20DE8C6E-7A4C-4208-9FDD-A2E28AE44E51}" type="datetimeFigureOut">
               <a:rPr lang="en-US" smtClean="0"/>
-              <a:t>10/7/2022</a:t>
+              <a:t>10/12/2022</a:t>
             </a:fld>
             <a:endParaRPr lang="en-US"/>
           </a:p>
@@ -2616,7 +2617,7 @@
           <a:p>
             <a:fld id="{20DE8C6E-7A4C-4208-9FDD-A2E28AE44E51}" type="datetimeFigureOut">
               <a:rPr lang="en-US" smtClean="0"/>
-              <a:t>10/7/2022</a:t>
+              <a:t>10/12/2022</a:t>
             </a:fld>
             <a:endParaRPr lang="en-US"/>
           </a:p>
@@ -3132,7 +3133,7 @@
 </p:sld>
 </file>
 
-<file path=ppt/slides/slide2.xml><?xml version="1.0" encoding="utf-8"?>
+<file path=ppt/slides/slide10.xml><?xml version="1.0" encoding="utf-8"?>
 <p:sld xmlns:a="http://schemas.openxmlformats.org/drawingml/2006/main" xmlns:r="http://schemas.openxmlformats.org/officeDocument/2006/relationships" xmlns:p="http://schemas.openxmlformats.org/presentationml/2006/main">
   <p:cSld>
     <p:spTree>
@@ -3229,7 +3230,7 @@
             <a:pPr algn="l"/>
             <a:r>
               <a:rPr lang="en-US" sz="6000" dirty="0" smtClean="0"/>
-              <a:t>The truth about storms</a:t>
+              <a:t>The storm reveals:</a:t>
             </a:r>
             <a:endParaRPr lang="en-US" sz="6000" dirty="0"/>
           </a:p>
@@ -3243,8 +3244,8 @@
         </p:nvSpPr>
         <p:spPr>
           <a:xfrm>
-            <a:off x="1219200" y="2089152"/>
-            <a:ext cx="6248400" cy="769441"/>
+            <a:off x="381000" y="2100122"/>
+            <a:ext cx="8382000" cy="2862322"/>
           </a:xfrm>
           <a:prstGeom prst="rect">
             <a:avLst/>
@@ -3257,78 +3258,66 @@
           </a:bodyPr>
           <a:lstStyle/>
           <a:p>
-            <a:r>
-              <a:rPr lang="en-US" sz="4400" b="1" dirty="0" smtClean="0"/>
-              <a:t>No body is exempted</a:t>
-            </a:r>
-            <a:endParaRPr lang="en-US" sz="4400" b="1" dirty="0"/>
-          </a:p>
-        </p:txBody>
-      </p:sp>
-      <p:sp>
-        <p:nvSpPr>
-          <p:cNvPr id="7" name="TextBox 6"/>
-          <p:cNvSpPr txBox="1"/>
-          <p:nvPr/>
-        </p:nvSpPr>
-        <p:spPr>
-          <a:xfrm>
-            <a:off x="1219200" y="3048000"/>
-            <a:ext cx="6248400" cy="769441"/>
-          </a:xfrm>
-          <a:prstGeom prst="rect">
-            <a:avLst/>
-          </a:prstGeom>
-          <a:noFill/>
-        </p:spPr>
-        <p:txBody>
-          <a:bodyPr wrap="square" rtlCol="0">
-            <a:spAutoFit/>
-          </a:bodyPr>
-          <a:lstStyle/>
-          <a:p>
-            <a:r>
-              <a:rPr lang="en-US" sz="4400" b="1" dirty="0" smtClean="0"/>
-              <a:t>It will always come</a:t>
-            </a:r>
-            <a:endParaRPr lang="en-US" sz="4400" b="1" dirty="0"/>
-          </a:p>
-        </p:txBody>
-      </p:sp>
-      <p:sp>
-        <p:nvSpPr>
-          <p:cNvPr id="8" name="TextBox 7"/>
-          <p:cNvSpPr txBox="1"/>
-          <p:nvPr/>
-        </p:nvSpPr>
-        <p:spPr>
-          <a:xfrm>
-            <a:off x="1219200" y="3969841"/>
-            <a:ext cx="6553200" cy="769441"/>
-          </a:xfrm>
-          <a:prstGeom prst="rect">
-            <a:avLst/>
-          </a:prstGeom>
-          <a:noFill/>
-        </p:spPr>
-        <p:txBody>
-          <a:bodyPr wrap="square" rtlCol="0">
-            <a:spAutoFit/>
-          </a:bodyPr>
-          <a:lstStyle/>
-          <a:p>
-            <a:r>
-              <a:rPr lang="en-US" sz="4400" b="1" dirty="0" smtClean="0"/>
-              <a:t>It reveal something in us</a:t>
-            </a:r>
-            <a:endParaRPr lang="en-US" sz="4400" b="1" dirty="0"/>
+            <a:pPr marL="571500" indent="-571500">
+              <a:buFont typeface="Arial" pitchFamily="34" charset="0"/>
+              <a:buChar char="•"/>
+            </a:pPr>
+            <a:r>
+              <a:rPr lang="en-US" sz="3600" b="1" dirty="0" smtClean="0"/>
+              <a:t>reveal the nature of faith</a:t>
+            </a:r>
+          </a:p>
+          <a:p>
+            <a:pPr marL="571500" indent="-571500">
+              <a:buFont typeface="Arial" pitchFamily="34" charset="0"/>
+              <a:buChar char="•"/>
+            </a:pPr>
+            <a:r>
+              <a:rPr lang="en-US" sz="3600" b="1" dirty="0" smtClean="0"/>
+              <a:t>reveal the strength of commitment</a:t>
+            </a:r>
+          </a:p>
+          <a:p>
+            <a:pPr marL="571500" indent="-571500">
+              <a:buFont typeface="Arial" pitchFamily="34" charset="0"/>
+              <a:buChar char="•"/>
+            </a:pPr>
+            <a:r>
+              <a:rPr lang="en-US" sz="3600" b="1" dirty="0" smtClean="0"/>
+              <a:t>reveal the level of maturity</a:t>
+            </a:r>
+          </a:p>
+          <a:p>
+            <a:pPr marL="571500" indent="-571500">
+              <a:buFont typeface="Arial" pitchFamily="34" charset="0"/>
+              <a:buChar char="•"/>
+            </a:pPr>
+            <a:r>
+              <a:rPr lang="en-US" sz="3600" b="1" dirty="0" smtClean="0"/>
+              <a:t>reveal the health of attitude</a:t>
+            </a:r>
+          </a:p>
+          <a:p>
+            <a:pPr marL="571500" indent="-571500">
+              <a:buFont typeface="Arial" pitchFamily="34" charset="0"/>
+              <a:buChar char="•"/>
+            </a:pPr>
+            <a:r>
+              <a:rPr lang="en-US" sz="3600" b="1" dirty="0" smtClean="0"/>
+              <a:t>reveal the measure of </a:t>
+            </a:r>
+            <a:r>
+              <a:rPr lang="en-US" sz="3600" b="1" dirty="0" err="1" smtClean="0"/>
+              <a:t>teachability</a:t>
+            </a:r>
+            <a:endParaRPr lang="en-US" sz="3600" b="1" dirty="0"/>
           </a:p>
         </p:txBody>
       </p:sp>
     </p:spTree>
     <p:extLst>
       <p:ext uri="{BB962C8B-B14F-4D97-AF65-F5344CB8AC3E}">
-        <p14:creationId xmlns:p14="http://schemas.microsoft.com/office/powerpoint/2010/main" val="1944061836"/>
+        <p14:creationId xmlns:p14="http://schemas.microsoft.com/office/powerpoint/2010/main" val="3846625994"/>
       </p:ext>
     </p:extLst>
   </p:cSld>
@@ -3345,7 +3334,7 @@
 </p:sld>
 </file>
 
-<file path=ppt/slides/slide3.xml><?xml version="1.0" encoding="utf-8"?>
+<file path=ppt/slides/slide2.xml><?xml version="1.0" encoding="utf-8"?>
 <p:sld xmlns:a="http://schemas.openxmlformats.org/drawingml/2006/main" xmlns:r="http://schemas.openxmlformats.org/officeDocument/2006/relationships" xmlns:p="http://schemas.openxmlformats.org/presentationml/2006/main">
   <p:cSld>
     <p:spTree>
@@ -3442,7 +3431,7 @@
             <a:pPr algn="l"/>
             <a:r>
               <a:rPr lang="en-US" sz="6000" dirty="0" smtClean="0"/>
-              <a:t>The storm reveals:</a:t>
+              <a:t>The truth about storms</a:t>
             </a:r>
             <a:endParaRPr lang="en-US" sz="6000" dirty="0"/>
           </a:p>
@@ -3456,8 +3445,8 @@
         </p:nvSpPr>
         <p:spPr>
           <a:xfrm>
-            <a:off x="381000" y="2100122"/>
-            <a:ext cx="8382000" cy="2862322"/>
+            <a:off x="1219200" y="2089152"/>
+            <a:ext cx="6248400" cy="769441"/>
           </a:xfrm>
           <a:prstGeom prst="rect">
             <a:avLst/>
@@ -3470,66 +3459,78 @@
           </a:bodyPr>
           <a:lstStyle/>
           <a:p>
-            <a:pPr marL="571500" indent="-571500">
-              <a:buFont typeface="Arial" pitchFamily="34" charset="0"/>
-              <a:buChar char="•"/>
-            </a:pPr>
-            <a:r>
-              <a:rPr lang="en-US" sz="3600" b="1" dirty="0" smtClean="0"/>
-              <a:t>reveal the nature of faith</a:t>
-            </a:r>
-          </a:p>
-          <a:p>
-            <a:pPr marL="571500" indent="-571500">
-              <a:buFont typeface="Arial" pitchFamily="34" charset="0"/>
-              <a:buChar char="•"/>
-            </a:pPr>
-            <a:r>
-              <a:rPr lang="en-US" sz="3600" b="1" dirty="0" smtClean="0"/>
-              <a:t>reveal the strength of commitment</a:t>
-            </a:r>
-          </a:p>
-          <a:p>
-            <a:pPr marL="571500" indent="-571500">
-              <a:buFont typeface="Arial" pitchFamily="34" charset="0"/>
-              <a:buChar char="•"/>
-            </a:pPr>
-            <a:r>
-              <a:rPr lang="en-US" sz="3600" b="1" dirty="0" smtClean="0"/>
-              <a:t>reveal the level of maturity</a:t>
-            </a:r>
-          </a:p>
-          <a:p>
-            <a:pPr marL="571500" indent="-571500">
-              <a:buFont typeface="Arial" pitchFamily="34" charset="0"/>
-              <a:buChar char="•"/>
-            </a:pPr>
-            <a:r>
-              <a:rPr lang="en-US" sz="3600" b="1" dirty="0" smtClean="0"/>
-              <a:t>reveal the health of attitude</a:t>
-            </a:r>
-          </a:p>
-          <a:p>
-            <a:pPr marL="571500" indent="-571500">
-              <a:buFont typeface="Arial" pitchFamily="34" charset="0"/>
-              <a:buChar char="•"/>
-            </a:pPr>
-            <a:r>
-              <a:rPr lang="en-US" sz="3600" b="1" dirty="0" smtClean="0"/>
-              <a:t>reveal the measure of </a:t>
-            </a:r>
-            <a:r>
-              <a:rPr lang="en-US" sz="3600" b="1" dirty="0" err="1" smtClean="0"/>
-              <a:t>teachability</a:t>
-            </a:r>
-            <a:endParaRPr lang="en-US" sz="3600" b="1" dirty="0"/>
+            <a:r>
+              <a:rPr lang="en-US" sz="4400" b="1" dirty="0" smtClean="0"/>
+              <a:t>No body is exempted</a:t>
+            </a:r>
+            <a:endParaRPr lang="en-US" sz="4400" b="1" dirty="0"/>
+          </a:p>
+        </p:txBody>
+      </p:sp>
+      <p:sp>
+        <p:nvSpPr>
+          <p:cNvPr id="7" name="TextBox 6"/>
+          <p:cNvSpPr txBox="1"/>
+          <p:nvPr/>
+        </p:nvSpPr>
+        <p:spPr>
+          <a:xfrm>
+            <a:off x="1219200" y="3048000"/>
+            <a:ext cx="6248400" cy="769441"/>
+          </a:xfrm>
+          <a:prstGeom prst="rect">
+            <a:avLst/>
+          </a:prstGeom>
+          <a:noFill/>
+        </p:spPr>
+        <p:txBody>
+          <a:bodyPr wrap="square" rtlCol="0">
+            <a:spAutoFit/>
+          </a:bodyPr>
+          <a:lstStyle/>
+          <a:p>
+            <a:r>
+              <a:rPr lang="en-US" sz="4400" b="1" dirty="0" smtClean="0"/>
+              <a:t>It will always come</a:t>
+            </a:r>
+            <a:endParaRPr lang="en-US" sz="4400" b="1" dirty="0"/>
+          </a:p>
+        </p:txBody>
+      </p:sp>
+      <p:sp>
+        <p:nvSpPr>
+          <p:cNvPr id="8" name="TextBox 7"/>
+          <p:cNvSpPr txBox="1"/>
+          <p:nvPr/>
+        </p:nvSpPr>
+        <p:spPr>
+          <a:xfrm>
+            <a:off x="1219200" y="3969841"/>
+            <a:ext cx="6553200" cy="769441"/>
+          </a:xfrm>
+          <a:prstGeom prst="rect">
+            <a:avLst/>
+          </a:prstGeom>
+          <a:noFill/>
+        </p:spPr>
+        <p:txBody>
+          <a:bodyPr wrap="square" rtlCol="0">
+            <a:spAutoFit/>
+          </a:bodyPr>
+          <a:lstStyle/>
+          <a:p>
+            <a:r>
+              <a:rPr lang="en-US" sz="4400" b="1" dirty="0" smtClean="0"/>
+              <a:t>It reveal something in us</a:t>
+            </a:r>
+            <a:endParaRPr lang="en-US" sz="4400" b="1" dirty="0"/>
           </a:p>
         </p:txBody>
       </p:sp>
     </p:spTree>
     <p:extLst>
       <p:ext uri="{BB962C8B-B14F-4D97-AF65-F5344CB8AC3E}">
-        <p14:creationId xmlns:p14="http://schemas.microsoft.com/office/powerpoint/2010/main" val="3846625994"/>
+        <p14:creationId xmlns:p14="http://schemas.microsoft.com/office/powerpoint/2010/main" val="1944061836"/>
       </p:ext>
     </p:extLst>
   </p:cSld>
@@ -3546,7 +3547,7 @@
 </p:sld>
 </file>
 
-<file path=ppt/slides/slide4.xml><?xml version="1.0" encoding="utf-8"?>
+<file path=ppt/slides/slide3.xml><?xml version="1.0" encoding="utf-8"?>
 <p:sld xmlns:a="http://schemas.openxmlformats.org/drawingml/2006/main" xmlns:r="http://schemas.openxmlformats.org/officeDocument/2006/relationships" xmlns:p="http://schemas.openxmlformats.org/presentationml/2006/main">
   <p:cSld>
     <p:spTree>
@@ -3683,7 +3684,15 @@
           <a:p>
             <a:r>
               <a:rPr lang="en-US" sz="6000" dirty="0" smtClean="0"/>
-              <a:t>2 Types of Storm We Could Choose</a:t>
+              <a:t>3 </a:t>
+            </a:r>
+            <a:r>
+              <a:rPr lang="en-US" sz="6000" dirty="0" smtClean="0"/>
+              <a:t>Types of Storm We Could </a:t>
+            </a:r>
+            <a:r>
+              <a:rPr lang="en-US" sz="6000" dirty="0" smtClean="0"/>
+              <a:t>Experience</a:t>
             </a:r>
             <a:endParaRPr lang="en-US" sz="6000" dirty="0"/>
           </a:p>
@@ -3693,6 +3702,223 @@
     <p:extLst>
       <p:ext uri="{BB962C8B-B14F-4D97-AF65-F5344CB8AC3E}">
         <p14:creationId xmlns:p14="http://schemas.microsoft.com/office/powerpoint/2010/main" val="913881702"/>
+      </p:ext>
+    </p:extLst>
+  </p:cSld>
+  <p:clrMapOvr>
+    <a:masterClrMapping/>
+  </p:clrMapOvr>
+  <p:timing>
+    <p:tnLst>
+      <p:par>
+        <p:cTn id="1" dur="indefinite" restart="never" nodeType="tmRoot"/>
+      </p:par>
+    </p:tnLst>
+  </p:timing>
+</p:sld>
+</file>
+
+<file path=ppt/slides/slide4.xml><?xml version="1.0" encoding="utf-8"?>
+<p:sld xmlns:a="http://schemas.openxmlformats.org/drawingml/2006/main" xmlns:r="http://schemas.openxmlformats.org/officeDocument/2006/relationships" xmlns:p="http://schemas.openxmlformats.org/presentationml/2006/main">
+  <p:cSld>
+    <p:spTree>
+      <p:nvGrpSpPr>
+        <p:cNvPr id="1" name=""/>
+        <p:cNvGrpSpPr/>
+        <p:nvPr/>
+      </p:nvGrpSpPr>
+      <p:grpSpPr>
+        <a:xfrm>
+          <a:off x="0" y="0"/>
+          <a:ext cx="0" cy="0"/>
+          <a:chOff x="0" y="0"/>
+          <a:chExt cx="0" cy="0"/>
+        </a:xfrm>
+      </p:grpSpPr>
+      <p:pic>
+        <p:nvPicPr>
+          <p:cNvPr id="2" name="Picture 2" descr="D:\Google Drive\ekklesia\DEV\960x01.jpg"/>
+          <p:cNvPicPr>
+            <a:picLocks noChangeAspect="1" noChangeArrowheads="1"/>
+          </p:cNvPicPr>
+          <p:nvPr/>
+        </p:nvPicPr>
+        <p:blipFill>
+          <a:blip r:embed="rId2">
+            <a:extLst>
+              <a:ext uri="{28A0092B-C50C-407E-A947-70E740481C1C}">
+                <a14:useLocalDpi xmlns:a14="http://schemas.microsoft.com/office/drawing/2010/main" val="0"/>
+              </a:ext>
+            </a:extLst>
+          </a:blip>
+          <a:srcRect/>
+          <a:stretch>
+            <a:fillRect/>
+          </a:stretch>
+        </p:blipFill>
+        <p:spPr bwMode="auto">
+          <a:xfrm>
+            <a:off x="-90056" y="0"/>
+            <a:ext cx="9144000" cy="1933575"/>
+          </a:xfrm>
+          <a:prstGeom prst="rect">
+            <a:avLst/>
+          </a:prstGeom>
+          <a:noFill/>
+          <a:extLst>
+            <a:ext uri="{909E8E84-426E-40DD-AFC4-6F175D3DCCD1}">
+              <a14:hiddenFill xmlns:a14="http://schemas.microsoft.com/office/drawing/2010/main">
+                <a:solidFill>
+                  <a:srgbClr val="FFFFFF"/>
+                </a:solidFill>
+              </a14:hiddenFill>
+            </a:ext>
+          </a:extLst>
+        </p:spPr>
+      </p:pic>
+      <p:sp>
+        <p:nvSpPr>
+          <p:cNvPr id="5" name="Title 1"/>
+          <p:cNvSpPr txBox="1">
+            <a:spLocks/>
+          </p:cNvSpPr>
+          <p:nvPr/>
+        </p:nvSpPr>
+        <p:spPr>
+          <a:xfrm>
+            <a:off x="0" y="609600"/>
+            <a:ext cx="8534400" cy="1828800"/>
+          </a:xfrm>
+          <a:prstGeom prst="rect">
+            <a:avLst/>
+          </a:prstGeom>
+        </p:spPr>
+        <p:txBody>
+          <a:bodyPr vert="horz" anchor="ctr">
+            <a:noAutofit/>
+            <a:scene3d>
+              <a:camera prst="orthographicFront"/>
+              <a:lightRig rig="soft" dir="t">
+                <a:rot lat="0" lon="0" rev="16800000"/>
+              </a:lightRig>
+            </a:scene3d>
+            <a:sp3d prstMaterial="softEdge">
+              <a:bevelT w="38100" h="38100"/>
+            </a:sp3d>
+          </a:bodyPr>
+          <a:lstStyle>
+            <a:lvl1pPr algn="ctr" rtl="0" eaLnBrk="1" latinLnBrk="0" hangingPunct="1">
+              <a:spcBef>
+                <a:spcPct val="0"/>
+              </a:spcBef>
+              <a:buNone/>
+              <a:defRPr kumimoji="0" sz="4100" b="1" kern="1200" cap="none" baseline="0">
+                <a:ln w="6350">
+                  <a:noFill/>
+                </a:ln>
+                <a:gradFill>
+                  <a:gsLst>
+                    <a:gs pos="0">
+                      <a:schemeClr val="accent1">
+                        <a:tint val="73000"/>
+                        <a:satMod val="145000"/>
+                      </a:schemeClr>
+                    </a:gs>
+                    <a:gs pos="73000">
+                      <a:schemeClr val="accent1">
+                        <a:tint val="73000"/>
+                        <a:satMod val="145000"/>
+                      </a:schemeClr>
+                    </a:gs>
+                    <a:gs pos="100000">
+                      <a:schemeClr val="accent1">
+                        <a:tint val="83000"/>
+                        <a:satMod val="143000"/>
+                      </a:schemeClr>
+                    </a:gs>
+                  </a:gsLst>
+                  <a:lin ang="4800000" scaled="1"/>
+                </a:gradFill>
+                <a:effectLst>
+                  <a:outerShdw blurRad="114300" dist="101600" dir="2700000" algn="tl" rotWithShape="0">
+                    <a:srgbClr val="000000">
+                      <a:alpha val="40000"/>
+                    </a:srgbClr>
+                  </a:outerShdw>
+                </a:effectLst>
+                <a:latin typeface="+mj-lt"/>
+                <a:ea typeface="+mj-ea"/>
+                <a:cs typeface="+mj-cs"/>
+              </a:defRPr>
+            </a:lvl1pPr>
+          </a:lstStyle>
+          <a:p>
+            <a:r>
+              <a:rPr lang="en-US" sz="6000" dirty="0" smtClean="0"/>
+              <a:t>1. The storm of Testing</a:t>
+            </a:r>
+          </a:p>
+          <a:p>
+            <a:endParaRPr lang="en-US" sz="6000" dirty="0"/>
+          </a:p>
+        </p:txBody>
+      </p:sp>
+      <p:sp>
+        <p:nvSpPr>
+          <p:cNvPr id="4" name="TextBox 3"/>
+          <p:cNvSpPr txBox="1"/>
+          <p:nvPr/>
+        </p:nvSpPr>
+        <p:spPr>
+          <a:xfrm>
+            <a:off x="124690" y="2209800"/>
+            <a:ext cx="8714509" cy="3416320"/>
+          </a:xfrm>
+          <a:prstGeom prst="rect">
+            <a:avLst/>
+          </a:prstGeom>
+          <a:noFill/>
+        </p:spPr>
+        <p:txBody>
+          <a:bodyPr wrap="square" rtlCol="0">
+            <a:spAutoFit/>
+          </a:bodyPr>
+          <a:lstStyle/>
+          <a:p>
+            <a:r>
+              <a:rPr lang="en-US" sz="3600" b="1" dirty="0" smtClean="0"/>
+              <a:t>James 1:2-3 </a:t>
+            </a:r>
+            <a:r>
+              <a:rPr lang="en-US" sz="3600" b="1" dirty="0"/>
+              <a:t>NIV</a:t>
+            </a:r>
+            <a:r>
+              <a:rPr lang="en-US" sz="3600" b="1" dirty="0"/>
+              <a:t/>
+            </a:r>
+            <a:br>
+              <a:rPr lang="en-US" sz="3600" b="1" dirty="0"/>
+            </a:br>
+            <a:r>
+              <a:rPr lang="en-US" sz="3600" b="1" dirty="0"/>
+              <a:t/>
+            </a:r>
+            <a:br>
+              <a:rPr lang="en-US" sz="3600" b="1" dirty="0"/>
+            </a:br>
+            <a:r>
+              <a:rPr lang="en-US" sz="3600" b="1" dirty="0"/>
+              <a:t>Consider it pure joy, my brothers and sisters, whenever you face trials of many kinds, because you know that the testing of your faith produces perseverance.</a:t>
+            </a:r>
+            <a:endParaRPr lang="en-US" sz="3600" b="1" dirty="0"/>
+          </a:p>
+        </p:txBody>
+      </p:sp>
+    </p:spTree>
+    <p:extLst>
+      <p:ext uri="{BB962C8B-B14F-4D97-AF65-F5344CB8AC3E}">
+        <p14:creationId xmlns:p14="http://schemas.microsoft.com/office/powerpoint/2010/main" val="2859836105"/>
       </p:ext>
     </p:extLst>
   </p:cSld>
@@ -3743,8 +3969,12 @@
           <a:p>
             <a:pPr algn="l"/>
             <a:r>
+              <a:rPr lang="en-US" dirty="0" smtClean="0"/>
+              <a:t>2. </a:t>
+            </a:r>
+            <a:r>
               <a:rPr lang="en-US" dirty="0"/>
-              <a:t>1. Storm of Disobedient</a:t>
+              <a:t>Storm of Disobedient</a:t>
             </a:r>
           </a:p>
         </p:txBody>
@@ -3844,8 +4074,12 @@
           <a:p>
             <a:pPr algn="l"/>
             <a:r>
+              <a:rPr lang="en-US" dirty="0" smtClean="0"/>
+              <a:t>3. </a:t>
+            </a:r>
+            <a:r>
               <a:rPr lang="en-US" dirty="0"/>
-              <a:t>2. Storm of Obedient</a:t>
+              <a:t>Storm of Obedient</a:t>
             </a:r>
           </a:p>
         </p:txBody>

--- a/In to the storm.pptx
+++ b/In to the storm.pptx
@@ -11,10 +11,13 @@
     <p:sldId id="267" r:id="rId5"/>
     <p:sldId id="260" r:id="rId6"/>
     <p:sldId id="261" r:id="rId7"/>
-    <p:sldId id="263" r:id="rId8"/>
-    <p:sldId id="264" r:id="rId9"/>
-    <p:sldId id="266" r:id="rId10"/>
-    <p:sldId id="258" r:id="rId11"/>
+    <p:sldId id="268" r:id="rId8"/>
+    <p:sldId id="270" r:id="rId9"/>
+    <p:sldId id="269" r:id="rId10"/>
+    <p:sldId id="263" r:id="rId11"/>
+    <p:sldId id="264" r:id="rId12"/>
+    <p:sldId id="266" r:id="rId13"/>
+    <p:sldId id="258" r:id="rId14"/>
   </p:sldIdLst>
   <p:sldSz cx="9144000" cy="6858000" type="screen4x3"/>
   <p:notesSz cx="6858000" cy="9144000"/>
@@ -227,6 +230,7 @@
           <a:p>
             <a:fld id="{20DE8C6E-7A4C-4208-9FDD-A2E28AE44E51}" type="datetimeFigureOut">
               <a:rPr lang="en-US" smtClean="0"/>
+              <a:pPr/>
               <a:t>10/12/2022</a:t>
             </a:fld>
             <a:endParaRPr lang="en-US"/>
@@ -269,6 +273,7 @@
           <a:p>
             <a:fld id="{9691A54E-310F-4EF4-9B7D-3C6510C9F775}" type="slidenum">
               <a:rPr lang="en-US" smtClean="0"/>
+              <a:pPr/>
               <a:t>‹#›</a:t>
             </a:fld>
             <a:endParaRPr lang="en-US"/>
@@ -453,6 +458,7 @@
           <a:p>
             <a:fld id="{20DE8C6E-7A4C-4208-9FDD-A2E28AE44E51}" type="datetimeFigureOut">
               <a:rPr lang="en-US" smtClean="0"/>
+              <a:pPr/>
               <a:t>10/12/2022</a:t>
             </a:fld>
             <a:endParaRPr lang="en-US"/>
@@ -495,6 +501,7 @@
           <a:p>
             <a:fld id="{9691A54E-310F-4EF4-9B7D-3C6510C9F775}" type="slidenum">
               <a:rPr lang="en-US" smtClean="0"/>
+              <a:pPr/>
               <a:t>‹#›</a:t>
             </a:fld>
             <a:endParaRPr lang="en-US"/>
@@ -628,6 +635,7 @@
           <a:p>
             <a:fld id="{20DE8C6E-7A4C-4208-9FDD-A2E28AE44E51}" type="datetimeFigureOut">
               <a:rPr lang="en-US" smtClean="0"/>
+              <a:pPr/>
               <a:t>10/12/2022</a:t>
             </a:fld>
             <a:endParaRPr lang="en-US"/>
@@ -670,6 +678,7 @@
           <a:p>
             <a:fld id="{9691A54E-310F-4EF4-9B7D-3C6510C9F775}" type="slidenum">
               <a:rPr lang="en-US" smtClean="0"/>
+              <a:pPr/>
               <a:t>‹#›</a:t>
             </a:fld>
             <a:endParaRPr lang="en-US"/>
@@ -793,6 +802,7 @@
           <a:p>
             <a:fld id="{20DE8C6E-7A4C-4208-9FDD-A2E28AE44E51}" type="datetimeFigureOut">
               <a:rPr lang="en-US" smtClean="0"/>
+              <a:pPr/>
               <a:t>10/12/2022</a:t>
             </a:fld>
             <a:endParaRPr lang="en-US"/>
@@ -835,6 +845,7 @@
           <a:p>
             <a:fld id="{9691A54E-310F-4EF4-9B7D-3C6510C9F775}" type="slidenum">
               <a:rPr lang="en-US" smtClean="0"/>
+              <a:pPr/>
               <a:t>‹#›</a:t>
             </a:fld>
             <a:endParaRPr lang="en-US"/>
@@ -1037,6 +1048,7 @@
           <a:p>
             <a:fld id="{20DE8C6E-7A4C-4208-9FDD-A2E28AE44E51}" type="datetimeFigureOut">
               <a:rPr lang="en-US" smtClean="0"/>
+              <a:pPr/>
               <a:t>10/12/2022</a:t>
             </a:fld>
             <a:endParaRPr lang="en-US"/>
@@ -1084,6 +1096,7 @@
           <a:p>
             <a:fld id="{9691A54E-310F-4EF4-9B7D-3C6510C9F775}" type="slidenum">
               <a:rPr lang="en-US" smtClean="0"/>
+              <a:pPr/>
               <a:t>‹#›</a:t>
             </a:fld>
             <a:endParaRPr lang="en-US"/>
@@ -1301,6 +1314,7 @@
           <a:p>
             <a:fld id="{20DE8C6E-7A4C-4208-9FDD-A2E28AE44E51}" type="datetimeFigureOut">
               <a:rPr lang="en-US" smtClean="0"/>
+              <a:pPr/>
               <a:t>10/12/2022</a:t>
             </a:fld>
             <a:endParaRPr lang="en-US"/>
@@ -1343,6 +1357,7 @@
           <a:p>
             <a:fld id="{9691A54E-310F-4EF4-9B7D-3C6510C9F775}" type="slidenum">
               <a:rPr lang="en-US" smtClean="0"/>
+              <a:pPr/>
               <a:t>‹#›</a:t>
             </a:fld>
             <a:endParaRPr lang="en-US"/>
@@ -1675,6 +1690,7 @@
           <a:p>
             <a:fld id="{20DE8C6E-7A4C-4208-9FDD-A2E28AE44E51}" type="datetimeFigureOut">
               <a:rPr lang="en-US" smtClean="0"/>
+              <a:pPr/>
               <a:t>10/12/2022</a:t>
             </a:fld>
             <a:endParaRPr lang="en-US"/>
@@ -1717,6 +1733,7 @@
           <a:p>
             <a:fld id="{9691A54E-310F-4EF4-9B7D-3C6510C9F775}" type="slidenum">
               <a:rPr lang="en-US" smtClean="0"/>
+              <a:pPr/>
               <a:t>‹#›</a:t>
             </a:fld>
             <a:endParaRPr lang="en-US"/>
@@ -1788,6 +1805,7 @@
           <a:p>
             <a:fld id="{20DE8C6E-7A4C-4208-9FDD-A2E28AE44E51}" type="datetimeFigureOut">
               <a:rPr lang="en-US" smtClean="0"/>
+              <a:pPr/>
               <a:t>10/12/2022</a:t>
             </a:fld>
             <a:endParaRPr lang="en-US"/>
@@ -1830,6 +1848,7 @@
           <a:p>
             <a:fld id="{9691A54E-310F-4EF4-9B7D-3C6510C9F775}" type="slidenum">
               <a:rPr lang="en-US" smtClean="0"/>
+              <a:pPr/>
               <a:t>‹#›</a:t>
             </a:fld>
             <a:endParaRPr lang="en-US"/>
@@ -1878,6 +1897,7 @@
           <a:p>
             <a:fld id="{20DE8C6E-7A4C-4208-9FDD-A2E28AE44E51}" type="datetimeFigureOut">
               <a:rPr lang="en-US" smtClean="0"/>
+              <a:pPr/>
               <a:t>10/12/2022</a:t>
             </a:fld>
             <a:endParaRPr lang="en-US"/>
@@ -1920,6 +1940,7 @@
           <a:p>
             <a:fld id="{9691A54E-310F-4EF4-9B7D-3C6510C9F775}" type="slidenum">
               <a:rPr lang="en-US" smtClean="0"/>
+              <a:pPr/>
               <a:t>‹#›</a:t>
             </a:fld>
             <a:endParaRPr lang="en-US"/>
@@ -2136,6 +2157,7 @@
           <a:p>
             <a:fld id="{20DE8C6E-7A4C-4208-9FDD-A2E28AE44E51}" type="datetimeFigureOut">
               <a:rPr lang="en-US" smtClean="0"/>
+              <a:pPr/>
               <a:t>10/12/2022</a:t>
             </a:fld>
             <a:endParaRPr lang="en-US"/>
@@ -2178,6 +2200,7 @@
           <a:p>
             <a:fld id="{9691A54E-310F-4EF4-9B7D-3C6510C9F775}" type="slidenum">
               <a:rPr lang="en-US" smtClean="0"/>
+              <a:pPr/>
               <a:t>‹#›</a:t>
             </a:fld>
             <a:endParaRPr lang="en-US"/>
@@ -2400,6 +2423,7 @@
           <a:p>
             <a:fld id="{20DE8C6E-7A4C-4208-9FDD-A2E28AE44E51}" type="datetimeFigureOut">
               <a:rPr lang="en-US" smtClean="0"/>
+              <a:pPr/>
               <a:t>10/12/2022</a:t>
             </a:fld>
             <a:endParaRPr lang="en-US"/>
@@ -2442,6 +2466,7 @@
           <a:p>
             <a:fld id="{9691A54E-310F-4EF4-9B7D-3C6510C9F775}" type="slidenum">
               <a:rPr lang="en-US" smtClean="0"/>
+              <a:pPr/>
               <a:t>‹#›</a:t>
             </a:fld>
             <a:endParaRPr lang="en-US"/>
@@ -2617,6 +2642,7 @@
           <a:p>
             <a:fld id="{20DE8C6E-7A4C-4208-9FDD-A2E28AE44E51}" type="datetimeFigureOut">
               <a:rPr lang="en-US" smtClean="0"/>
+              <a:pPr/>
               <a:t>10/12/2022</a:t>
             </a:fld>
             <a:endParaRPr lang="en-US"/>
@@ -2695,6 +2721,7 @@
           <a:p>
             <a:fld id="{9691A54E-310F-4EF4-9B7D-3C6510C9F775}" type="slidenum">
               <a:rPr lang="en-US" smtClean="0"/>
+              <a:pPr/>
               <a:t>‹#›</a:t>
             </a:fld>
             <a:endParaRPr lang="en-US"/>
@@ -3059,7 +3086,7 @@
           <a:blip r:embed="rId2">
             <a:extLst>
               <a:ext uri="{28A0092B-C50C-407E-A947-70E740481C1C}">
-                <a14:useLocalDpi xmlns:a14="http://schemas.microsoft.com/office/drawing/2010/main" val="0"/>
+                <a14:useLocalDpi xmlns:a14="http://schemas.microsoft.com/office/drawing/2010/main" xmlns="" val="0"/>
               </a:ext>
             </a:extLst>
           </a:blip>
@@ -3079,7 +3106,7 @@
           <a:noFill/>
           <a:extLst>
             <a:ext uri="{909E8E84-426E-40DD-AFC4-6F175D3DCCD1}">
-              <a14:hiddenFill xmlns:a14="http://schemas.microsoft.com/office/drawing/2010/main">
+              <a14:hiddenFill xmlns:a14="http://schemas.microsoft.com/office/drawing/2010/main" xmlns="">
                 <a:solidFill>
                   <a:srgbClr val="FFFFFF"/>
                 </a:solidFill>
@@ -3098,16 +3125,25 @@
             <p:ph type="ctrTitle"/>
           </p:nvPr>
         </p:nvSpPr>
-        <p:spPr/>
+        <p:spPr>
+          <a:xfrm>
+            <a:off x="422030" y="1676400"/>
+            <a:ext cx="8229600" cy="1524000"/>
+          </a:xfrm>
+        </p:spPr>
         <p:txBody>
           <a:bodyPr>
-            <a:normAutofit/>
+            <a:normAutofit fontScale="90000"/>
           </a:bodyPr>
           <a:lstStyle/>
           <a:p>
             <a:r>
               <a:rPr lang="en-US" sz="7200" dirty="0" smtClean="0"/>
-              <a:t>In to the storm</a:t>
+              <a:t>Into </a:t>
+            </a:r>
+            <a:r>
+              <a:rPr lang="en-US" sz="7200" dirty="0" smtClean="0"/>
+              <a:t>the storm</a:t>
             </a:r>
             <a:endParaRPr lang="en-US" sz="7200" dirty="0"/>
           </a:p>
@@ -3116,7 +3152,7 @@
     </p:spTree>
     <p:extLst>
       <p:ext uri="{BB962C8B-B14F-4D97-AF65-F5344CB8AC3E}">
-        <p14:creationId xmlns:p14="http://schemas.microsoft.com/office/powerpoint/2010/main" val="4029473970"/>
+        <p14:creationId xmlns:p14="http://schemas.microsoft.com/office/powerpoint/2010/main" xmlns="" val="4029473970"/>
       </p:ext>
     </p:extLst>
   </p:cSld>
@@ -3150,6 +3186,47 @@
           <a:chExt cx="0" cy="0"/>
         </a:xfrm>
       </p:grpSpPr>
+      <p:pic>
+        <p:nvPicPr>
+          <p:cNvPr id="5122" name="Picture 2" descr="D:\Google Drive\ekklesia\DEV\maxresdefault.jpg"/>
+          <p:cNvPicPr>
+            <a:picLocks noChangeAspect="1" noChangeArrowheads="1"/>
+          </p:cNvPicPr>
+          <p:nvPr/>
+        </p:nvPicPr>
+        <p:blipFill>
+          <a:blip r:embed="rId2">
+            <a:extLst>
+              <a:ext uri="{28A0092B-C50C-407E-A947-70E740481C1C}">
+                <a14:useLocalDpi xmlns:a14="http://schemas.microsoft.com/office/drawing/2010/main" xmlns="" val="0"/>
+              </a:ext>
+            </a:extLst>
+          </a:blip>
+          <a:srcRect/>
+          <a:stretch>
+            <a:fillRect/>
+          </a:stretch>
+        </p:blipFill>
+        <p:spPr bwMode="auto">
+          <a:xfrm>
+            <a:off x="0" y="76200"/>
+            <a:ext cx="9144000" cy="6324600"/>
+          </a:xfrm>
+          <a:prstGeom prst="rect">
+            <a:avLst/>
+          </a:prstGeom>
+          <a:noFill/>
+          <a:extLst>
+            <a:ext uri="{909E8E84-426E-40DD-AFC4-6F175D3DCCD1}">
+              <a14:hiddenFill xmlns:a14="http://schemas.microsoft.com/office/drawing/2010/main" xmlns="">
+                <a:solidFill>
+                  <a:srgbClr val="FFFFFF"/>
+                </a:solidFill>
+              </a14:hiddenFill>
+            </a:ext>
+          </a:extLst>
+        </p:spPr>
+      </p:pic>
       <p:sp>
         <p:nvSpPr>
           <p:cNvPr id="5" name="Title 1"/>
@@ -3160,8 +3237,8 @@
         </p:nvSpPr>
         <p:spPr>
           <a:xfrm>
-            <a:off x="0" y="609600"/>
-            <a:ext cx="8534400" cy="1828800"/>
+            <a:off x="0" y="-304800"/>
+            <a:ext cx="9144000" cy="1828800"/>
           </a:xfrm>
           <a:prstGeom prst="rect">
             <a:avLst/>
@@ -3227,97 +3304,18 @@
             </a:lvl1pPr>
           </a:lstStyle>
           <a:p>
-            <a:pPr algn="l"/>
-            <a:r>
-              <a:rPr lang="en-US" sz="6000" dirty="0" smtClean="0"/>
-              <a:t>The storm reveals:</a:t>
-            </a:r>
-            <a:endParaRPr lang="en-US" sz="6000" dirty="0"/>
-          </a:p>
-        </p:txBody>
-      </p:sp>
-      <p:sp>
-        <p:nvSpPr>
-          <p:cNvPr id="6" name="TextBox 5"/>
-          <p:cNvSpPr txBox="1"/>
-          <p:nvPr/>
-        </p:nvSpPr>
-        <p:spPr>
-          <a:xfrm>
-            <a:off x="381000" y="2100122"/>
-            <a:ext cx="8382000" cy="2862322"/>
-          </a:xfrm>
-          <a:prstGeom prst="rect">
-            <a:avLst/>
-          </a:prstGeom>
-          <a:noFill/>
-        </p:spPr>
-        <p:txBody>
-          <a:bodyPr wrap="square" rtlCol="0">
-            <a:spAutoFit/>
-          </a:bodyPr>
-          <a:lstStyle/>
-          <a:p>
-            <a:pPr marL="571500" indent="-571500">
-              <a:buFont typeface="Arial" pitchFamily="34" charset="0"/>
-              <a:buChar char="•"/>
-            </a:pPr>
-            <a:r>
-              <a:rPr lang="en-US" sz="3600" b="1" dirty="0" smtClean="0"/>
-              <a:t>reveal the nature of faith</a:t>
-            </a:r>
-          </a:p>
-          <a:p>
-            <a:pPr marL="571500" indent="-571500">
-              <a:buFont typeface="Arial" pitchFamily="34" charset="0"/>
-              <a:buChar char="•"/>
-            </a:pPr>
-            <a:r>
-              <a:rPr lang="en-US" sz="3600" b="1" dirty="0" smtClean="0"/>
-              <a:t>reveal the strength of commitment</a:t>
-            </a:r>
-          </a:p>
-          <a:p>
-            <a:pPr marL="571500" indent="-571500">
-              <a:buFont typeface="Arial" pitchFamily="34" charset="0"/>
-              <a:buChar char="•"/>
-            </a:pPr>
-            <a:r>
-              <a:rPr lang="en-US" sz="3600" b="1" dirty="0" smtClean="0"/>
-              <a:t>reveal the level of maturity</a:t>
-            </a:r>
-          </a:p>
-          <a:p>
-            <a:pPr marL="571500" indent="-571500">
-              <a:buFont typeface="Arial" pitchFamily="34" charset="0"/>
-              <a:buChar char="•"/>
-            </a:pPr>
-            <a:r>
-              <a:rPr lang="en-US" sz="3600" b="1" dirty="0" smtClean="0"/>
-              <a:t>reveal the health of attitude</a:t>
-            </a:r>
-          </a:p>
-          <a:p>
-            <a:pPr marL="571500" indent="-571500">
-              <a:buFont typeface="Arial" pitchFamily="34" charset="0"/>
-              <a:buChar char="•"/>
-            </a:pPr>
-            <a:r>
-              <a:rPr lang="en-US" sz="3600" b="1" dirty="0" smtClean="0"/>
-              <a:t>reveal the measure of </a:t>
-            </a:r>
-            <a:r>
-              <a:rPr lang="en-US" sz="3600" b="1" dirty="0" err="1" smtClean="0"/>
-              <a:t>teachability</a:t>
-            </a:r>
-            <a:endParaRPr lang="en-US" sz="3600" b="1" dirty="0"/>
+            <a:r>
+              <a:rPr lang="en-US" sz="4800" dirty="0" smtClean="0"/>
+              <a:t>Facing The Storm </a:t>
+            </a:r>
+            <a:endParaRPr lang="en-US" sz="4800" dirty="0"/>
           </a:p>
         </p:txBody>
       </p:sp>
     </p:spTree>
     <p:extLst>
       <p:ext uri="{BB962C8B-B14F-4D97-AF65-F5344CB8AC3E}">
-        <p14:creationId xmlns:p14="http://schemas.microsoft.com/office/powerpoint/2010/main" val="3846625994"/>
+        <p14:creationId xmlns:p14="http://schemas.microsoft.com/office/powerpoint/2010/main" xmlns="" val="1657937607"/>
       </p:ext>
     </p:extLst>
   </p:cSld>
@@ -3334,7 +3332,281 @@
 </p:sld>
 </file>
 
-<file path=ppt/slides/slide2.xml><?xml version="1.0" encoding="utf-8"?>
+<file path=ppt/slides/slide11.xml><?xml version="1.0" encoding="utf-8"?>
+<p:sld xmlns:a="http://schemas.openxmlformats.org/drawingml/2006/main" xmlns:r="http://schemas.openxmlformats.org/officeDocument/2006/relationships" xmlns:p="http://schemas.openxmlformats.org/presentationml/2006/main">
+  <p:cSld>
+    <p:spTree>
+      <p:nvGrpSpPr>
+        <p:cNvPr id="1" name=""/>
+        <p:cNvGrpSpPr/>
+        <p:nvPr/>
+      </p:nvGrpSpPr>
+      <p:grpSpPr>
+        <a:xfrm>
+          <a:off x="0" y="0"/>
+          <a:ext cx="0" cy="0"/>
+          <a:chOff x="0" y="0"/>
+          <a:chExt cx="0" cy="0"/>
+        </a:xfrm>
+      </p:grpSpPr>
+      <p:sp>
+        <p:nvSpPr>
+          <p:cNvPr id="2" name="Title 1"/>
+          <p:cNvSpPr>
+            <a:spLocks noGrp="1"/>
+          </p:cNvSpPr>
+          <p:nvPr>
+            <p:ph type="title"/>
+          </p:nvPr>
+        </p:nvSpPr>
+        <p:spPr/>
+        <p:txBody>
+          <a:bodyPr>
+            <a:normAutofit fontScale="90000"/>
+          </a:bodyPr>
+          <a:lstStyle/>
+          <a:p>
+            <a:r>
+              <a:rPr lang="en-US" dirty="0" smtClean="0"/>
+              <a:t>Facing the storm like an eagle</a:t>
+            </a:r>
+            <a:endParaRPr lang="en-US" dirty="0"/>
+          </a:p>
+        </p:txBody>
+      </p:sp>
+      <p:sp>
+        <p:nvSpPr>
+          <p:cNvPr id="5" name="TextBox 4"/>
+          <p:cNvSpPr txBox="1"/>
+          <p:nvPr/>
+        </p:nvSpPr>
+        <p:spPr>
+          <a:xfrm>
+            <a:off x="381000" y="1676400"/>
+            <a:ext cx="8382000" cy="3970318"/>
+          </a:xfrm>
+          <a:prstGeom prst="rect">
+            <a:avLst/>
+          </a:prstGeom>
+          <a:noFill/>
+        </p:spPr>
+        <p:txBody>
+          <a:bodyPr wrap="square" rtlCol="0">
+            <a:spAutoFit/>
+          </a:bodyPr>
+          <a:lstStyle/>
+          <a:p>
+            <a:pPr marL="571500" indent="-571500">
+              <a:buFont typeface="Arial" pitchFamily="34" charset="0"/>
+              <a:buChar char="•"/>
+            </a:pPr>
+            <a:r>
+              <a:rPr lang="en-US" sz="3600" b="1" dirty="0" smtClean="0"/>
+              <a:t>Understand the storm</a:t>
+            </a:r>
+          </a:p>
+          <a:p>
+            <a:pPr marL="571500" indent="-571500">
+              <a:buFont typeface="Arial" pitchFamily="34" charset="0"/>
+              <a:buChar char="•"/>
+            </a:pPr>
+            <a:r>
+              <a:rPr lang="en-US" sz="3600" b="1" dirty="0" smtClean="0"/>
+              <a:t>is the only bird that looks for storm</a:t>
+            </a:r>
+          </a:p>
+          <a:p>
+            <a:pPr marL="571500" indent="-571500">
+              <a:buFont typeface="Arial" pitchFamily="34" charset="0"/>
+              <a:buChar char="•"/>
+            </a:pPr>
+            <a:r>
+              <a:rPr lang="en-US" sz="3600" b="1" dirty="0" smtClean="0"/>
+              <a:t>the eagle gladly welcome the storms</a:t>
+            </a:r>
+          </a:p>
+          <a:p>
+            <a:pPr marL="571500" indent="-571500">
+              <a:buFont typeface="Arial" pitchFamily="34" charset="0"/>
+              <a:buChar char="•"/>
+            </a:pPr>
+            <a:r>
+              <a:rPr lang="en-US" sz="3600" b="1" dirty="0" smtClean="0"/>
+              <a:t>the eagle uses the storm to increase their height</a:t>
+            </a:r>
+          </a:p>
+          <a:p>
+            <a:pPr marL="571500" indent="-571500">
+              <a:buFont typeface="Arial" pitchFamily="34" charset="0"/>
+              <a:buChar char="•"/>
+            </a:pPr>
+            <a:r>
+              <a:rPr lang="en-US" sz="3600" b="1" dirty="0" smtClean="0"/>
+              <a:t>the eagle flies towards the storm</a:t>
+            </a:r>
+          </a:p>
+          <a:p>
+            <a:pPr marL="571500" indent="-571500">
+              <a:buFont typeface="Arial" pitchFamily="34" charset="0"/>
+              <a:buChar char="•"/>
+            </a:pPr>
+            <a:endParaRPr lang="en-US" sz="3600" b="1" dirty="0"/>
+          </a:p>
+        </p:txBody>
+      </p:sp>
+    </p:spTree>
+    <p:extLst>
+      <p:ext uri="{BB962C8B-B14F-4D97-AF65-F5344CB8AC3E}">
+        <p14:creationId xmlns:p14="http://schemas.microsoft.com/office/powerpoint/2010/main" xmlns="" val="3778602726"/>
+      </p:ext>
+    </p:extLst>
+  </p:cSld>
+  <p:clrMapOvr>
+    <a:masterClrMapping/>
+  </p:clrMapOvr>
+  <p:timing>
+    <p:tnLst>
+      <p:par>
+        <p:cTn id="1" dur="indefinite" restart="never" nodeType="tmRoot"/>
+      </p:par>
+    </p:tnLst>
+  </p:timing>
+</p:sld>
+</file>
+
+<file path=ppt/slides/slide12.xml><?xml version="1.0" encoding="utf-8"?>
+<p:sld xmlns:a="http://schemas.openxmlformats.org/drawingml/2006/main" xmlns:r="http://schemas.openxmlformats.org/officeDocument/2006/relationships" xmlns:p="http://schemas.openxmlformats.org/presentationml/2006/main">
+  <p:cSld>
+    <p:spTree>
+      <p:nvGrpSpPr>
+        <p:cNvPr id="1" name=""/>
+        <p:cNvGrpSpPr/>
+        <p:nvPr/>
+      </p:nvGrpSpPr>
+      <p:grpSpPr>
+        <a:xfrm>
+          <a:off x="0" y="0"/>
+          <a:ext cx="0" cy="0"/>
+          <a:chOff x="0" y="0"/>
+          <a:chExt cx="0" cy="0"/>
+        </a:xfrm>
+      </p:grpSpPr>
+      <p:sp>
+        <p:nvSpPr>
+          <p:cNvPr id="2" name="Title 1"/>
+          <p:cNvSpPr>
+            <a:spLocks noGrp="1"/>
+          </p:cNvSpPr>
+          <p:nvPr>
+            <p:ph type="title"/>
+          </p:nvPr>
+        </p:nvSpPr>
+        <p:spPr/>
+        <p:txBody>
+          <a:bodyPr>
+            <a:normAutofit fontScale="90000"/>
+          </a:bodyPr>
+          <a:lstStyle/>
+          <a:p>
+            <a:r>
+              <a:rPr lang="en-US" dirty="0" smtClean="0"/>
+              <a:t>Facing the storm like an eagle</a:t>
+            </a:r>
+            <a:endParaRPr lang="en-US" dirty="0"/>
+          </a:p>
+        </p:txBody>
+      </p:sp>
+      <p:sp>
+        <p:nvSpPr>
+          <p:cNvPr id="5" name="TextBox 4"/>
+          <p:cNvSpPr txBox="1"/>
+          <p:nvPr/>
+        </p:nvSpPr>
+        <p:spPr>
+          <a:xfrm>
+            <a:off x="381000" y="1676400"/>
+            <a:ext cx="8382000" cy="5078313"/>
+          </a:xfrm>
+          <a:prstGeom prst="rect">
+            <a:avLst/>
+          </a:prstGeom>
+          <a:noFill/>
+        </p:spPr>
+        <p:txBody>
+          <a:bodyPr wrap="square" rtlCol="0">
+            <a:spAutoFit/>
+          </a:bodyPr>
+          <a:lstStyle/>
+          <a:p>
+            <a:pPr marL="571500" indent="-571500">
+              <a:buFont typeface="Arial" pitchFamily="34" charset="0"/>
+              <a:buChar char="•"/>
+            </a:pPr>
+            <a:r>
+              <a:rPr lang="en-US" sz="3600" b="1" dirty="0" smtClean="0"/>
+              <a:t>the eagle uses the storm to cleans his feather</a:t>
+            </a:r>
+          </a:p>
+          <a:p>
+            <a:pPr marL="571500" indent="-571500">
+              <a:buFont typeface="Arial" pitchFamily="34" charset="0"/>
+              <a:buChar char="•"/>
+            </a:pPr>
+            <a:r>
+              <a:rPr lang="en-US" sz="3600" b="1" dirty="0" smtClean="0"/>
+              <a:t>the eagle uses the storm to test its pinions and bones</a:t>
+            </a:r>
+          </a:p>
+          <a:p>
+            <a:pPr marL="571500" indent="-571500">
+              <a:buFont typeface="Arial" pitchFamily="34" charset="0"/>
+              <a:buChar char="•"/>
+            </a:pPr>
+            <a:r>
+              <a:rPr lang="en-US" sz="3600" b="1" dirty="0" smtClean="0"/>
+              <a:t>the eagle uses the storm to renew his strength</a:t>
+            </a:r>
+          </a:p>
+          <a:p>
+            <a:pPr marL="571500" indent="-571500">
+              <a:buFont typeface="Arial" pitchFamily="34" charset="0"/>
+              <a:buChar char="•"/>
+            </a:pPr>
+            <a:r>
+              <a:rPr lang="en-US" sz="3600" b="1" dirty="0" smtClean="0"/>
+              <a:t>the eagle will leave the storm after using the storm</a:t>
+            </a:r>
+          </a:p>
+          <a:p>
+            <a:pPr marL="571500" indent="-571500">
+              <a:buFont typeface="Arial" pitchFamily="34" charset="0"/>
+              <a:buChar char="•"/>
+            </a:pPr>
+            <a:endParaRPr lang="en-US" sz="3600" b="1" dirty="0"/>
+          </a:p>
+        </p:txBody>
+      </p:sp>
+    </p:spTree>
+    <p:extLst>
+      <p:ext uri="{BB962C8B-B14F-4D97-AF65-F5344CB8AC3E}">
+        <p14:creationId xmlns:p14="http://schemas.microsoft.com/office/powerpoint/2010/main" xmlns="" val="592737160"/>
+      </p:ext>
+    </p:extLst>
+  </p:cSld>
+  <p:clrMapOvr>
+    <a:masterClrMapping/>
+  </p:clrMapOvr>
+  <p:timing>
+    <p:tnLst>
+      <p:par>
+        <p:cTn id="1" dur="indefinite" restart="never" nodeType="tmRoot"/>
+      </p:par>
+    </p:tnLst>
+  </p:timing>
+</p:sld>
+</file>
+
+<file path=ppt/slides/slide13.xml><?xml version="1.0" encoding="utf-8"?>
 <p:sld xmlns:a="http://schemas.openxmlformats.org/drawingml/2006/main" xmlns:r="http://schemas.openxmlformats.org/officeDocument/2006/relationships" xmlns:p="http://schemas.openxmlformats.org/presentationml/2006/main">
   <p:cSld>
     <p:spTree>
@@ -3431,7 +3703,7 @@
             <a:pPr algn="l"/>
             <a:r>
               <a:rPr lang="en-US" sz="6000" dirty="0" smtClean="0"/>
-              <a:t>The truth about storms</a:t>
+              <a:t>The storm reveals:</a:t>
             </a:r>
             <a:endParaRPr lang="en-US" sz="6000" dirty="0"/>
           </a:p>
@@ -3445,8 +3717,8 @@
         </p:nvSpPr>
         <p:spPr>
           <a:xfrm>
-            <a:off x="1219200" y="2089152"/>
-            <a:ext cx="6248400" cy="769441"/>
+            <a:off x="381000" y="2100122"/>
+            <a:ext cx="8382000" cy="2862322"/>
           </a:xfrm>
           <a:prstGeom prst="rect">
             <a:avLst/>
@@ -3459,78 +3731,66 @@
           </a:bodyPr>
           <a:lstStyle/>
           <a:p>
-            <a:r>
-              <a:rPr lang="en-US" sz="4400" b="1" dirty="0" smtClean="0"/>
-              <a:t>No body is exempted</a:t>
-            </a:r>
-            <a:endParaRPr lang="en-US" sz="4400" b="1" dirty="0"/>
-          </a:p>
-        </p:txBody>
-      </p:sp>
-      <p:sp>
-        <p:nvSpPr>
-          <p:cNvPr id="7" name="TextBox 6"/>
-          <p:cNvSpPr txBox="1"/>
-          <p:nvPr/>
-        </p:nvSpPr>
-        <p:spPr>
-          <a:xfrm>
-            <a:off x="1219200" y="3048000"/>
-            <a:ext cx="6248400" cy="769441"/>
-          </a:xfrm>
-          <a:prstGeom prst="rect">
-            <a:avLst/>
-          </a:prstGeom>
-          <a:noFill/>
-        </p:spPr>
-        <p:txBody>
-          <a:bodyPr wrap="square" rtlCol="0">
-            <a:spAutoFit/>
-          </a:bodyPr>
-          <a:lstStyle/>
-          <a:p>
-            <a:r>
-              <a:rPr lang="en-US" sz="4400" b="1" dirty="0" smtClean="0"/>
-              <a:t>It will always come</a:t>
-            </a:r>
-            <a:endParaRPr lang="en-US" sz="4400" b="1" dirty="0"/>
-          </a:p>
-        </p:txBody>
-      </p:sp>
-      <p:sp>
-        <p:nvSpPr>
-          <p:cNvPr id="8" name="TextBox 7"/>
-          <p:cNvSpPr txBox="1"/>
-          <p:nvPr/>
-        </p:nvSpPr>
-        <p:spPr>
-          <a:xfrm>
-            <a:off x="1219200" y="3969841"/>
-            <a:ext cx="6553200" cy="769441"/>
-          </a:xfrm>
-          <a:prstGeom prst="rect">
-            <a:avLst/>
-          </a:prstGeom>
-          <a:noFill/>
-        </p:spPr>
-        <p:txBody>
-          <a:bodyPr wrap="square" rtlCol="0">
-            <a:spAutoFit/>
-          </a:bodyPr>
-          <a:lstStyle/>
-          <a:p>
-            <a:r>
-              <a:rPr lang="en-US" sz="4400" b="1" dirty="0" smtClean="0"/>
-              <a:t>It reveal something in us</a:t>
-            </a:r>
-            <a:endParaRPr lang="en-US" sz="4400" b="1" dirty="0"/>
+            <a:pPr marL="571500" indent="-571500">
+              <a:buFont typeface="Arial" pitchFamily="34" charset="0"/>
+              <a:buChar char="•"/>
+            </a:pPr>
+            <a:r>
+              <a:rPr lang="en-US" sz="3600" b="1" dirty="0" smtClean="0"/>
+              <a:t>reveal the nature of faith</a:t>
+            </a:r>
+          </a:p>
+          <a:p>
+            <a:pPr marL="571500" indent="-571500">
+              <a:buFont typeface="Arial" pitchFamily="34" charset="0"/>
+              <a:buChar char="•"/>
+            </a:pPr>
+            <a:r>
+              <a:rPr lang="en-US" sz="3600" b="1" dirty="0" smtClean="0"/>
+              <a:t>reveal the strength of commitment</a:t>
+            </a:r>
+          </a:p>
+          <a:p>
+            <a:pPr marL="571500" indent="-571500">
+              <a:buFont typeface="Arial" pitchFamily="34" charset="0"/>
+              <a:buChar char="•"/>
+            </a:pPr>
+            <a:r>
+              <a:rPr lang="en-US" sz="3600" b="1" dirty="0" smtClean="0"/>
+              <a:t>reveal the level of maturity</a:t>
+            </a:r>
+          </a:p>
+          <a:p>
+            <a:pPr marL="571500" indent="-571500">
+              <a:buFont typeface="Arial" pitchFamily="34" charset="0"/>
+              <a:buChar char="•"/>
+            </a:pPr>
+            <a:r>
+              <a:rPr lang="en-US" sz="3600" b="1" dirty="0" smtClean="0"/>
+              <a:t>reveal the health of attitude</a:t>
+            </a:r>
+          </a:p>
+          <a:p>
+            <a:pPr marL="571500" indent="-571500">
+              <a:buFont typeface="Arial" pitchFamily="34" charset="0"/>
+              <a:buChar char="•"/>
+            </a:pPr>
+            <a:r>
+              <a:rPr lang="en-US" sz="3600" b="1" dirty="0" smtClean="0"/>
+              <a:t>reveal the measure of </a:t>
+            </a:r>
+            <a:r>
+              <a:rPr lang="en-US" sz="3600" b="1" dirty="0" err="1" smtClean="0"/>
+              <a:t>teachability</a:t>
+            </a:r>
+            <a:endParaRPr lang="en-US" sz="3600" b="1" dirty="0"/>
           </a:p>
         </p:txBody>
       </p:sp>
     </p:spTree>
     <p:extLst>
       <p:ext uri="{BB962C8B-B14F-4D97-AF65-F5344CB8AC3E}">
-        <p14:creationId xmlns:p14="http://schemas.microsoft.com/office/powerpoint/2010/main" val="1944061836"/>
+        <p14:creationId xmlns:p14="http://schemas.microsoft.com/office/powerpoint/2010/main" xmlns="" val="3846625994"/>
       </p:ext>
     </p:extLst>
   </p:cSld>
@@ -3547,7 +3807,7 @@
 </p:sld>
 </file>
 
-<file path=ppt/slides/slide3.xml><?xml version="1.0" encoding="utf-8"?>
+<file path=ppt/slides/slide2.xml><?xml version="1.0" encoding="utf-8"?>
 <p:sld xmlns:a="http://schemas.openxmlformats.org/drawingml/2006/main" xmlns:r="http://schemas.openxmlformats.org/officeDocument/2006/relationships" xmlns:p="http://schemas.openxmlformats.org/presentationml/2006/main">
   <p:cSld>
     <p:spTree>
@@ -3564,47 +3824,6 @@
           <a:chExt cx="0" cy="0"/>
         </a:xfrm>
       </p:grpSpPr>
-      <p:pic>
-        <p:nvPicPr>
-          <p:cNvPr id="1026" name="Picture 2" descr="D:\Google Drive\ekklesia\DEV\960x0.jpg"/>
-          <p:cNvPicPr>
-            <a:picLocks noChangeAspect="1" noChangeArrowheads="1"/>
-          </p:cNvPicPr>
-          <p:nvPr/>
-        </p:nvPicPr>
-        <p:blipFill>
-          <a:blip r:embed="rId2">
-            <a:extLst>
-              <a:ext uri="{28A0092B-C50C-407E-A947-70E740481C1C}">
-                <a14:useLocalDpi xmlns:a14="http://schemas.microsoft.com/office/drawing/2010/main" val="0"/>
-              </a:ext>
-            </a:extLst>
-          </a:blip>
-          <a:srcRect/>
-          <a:stretch>
-            <a:fillRect/>
-          </a:stretch>
-        </p:blipFill>
-        <p:spPr bwMode="auto">
-          <a:xfrm>
-            <a:off x="-609600" y="-6927"/>
-            <a:ext cx="10113178" cy="6858000"/>
-          </a:xfrm>
-          <a:prstGeom prst="rect">
-            <a:avLst/>
-          </a:prstGeom>
-          <a:noFill/>
-          <a:extLst>
-            <a:ext uri="{909E8E84-426E-40DD-AFC4-6F175D3DCCD1}">
-              <a14:hiddenFill xmlns:a14="http://schemas.microsoft.com/office/drawing/2010/main">
-                <a:solidFill>
-                  <a:srgbClr val="FFFFFF"/>
-                </a:solidFill>
-              </a14:hiddenFill>
-            </a:ext>
-          </a:extLst>
-        </p:spPr>
-      </p:pic>
       <p:sp>
         <p:nvSpPr>
           <p:cNvPr id="5" name="Title 1"/>
@@ -3616,7 +3835,7 @@
         <p:spPr>
           <a:xfrm>
             <a:off x="0" y="609600"/>
-            <a:ext cx="8534400" cy="1828800"/>
+            <a:ext cx="9144000" cy="1828800"/>
           </a:xfrm>
           <a:prstGeom prst="rect">
             <a:avLst/>
@@ -3682,26 +3901,125 @@
             </a:lvl1pPr>
           </a:lstStyle>
           <a:p>
+            <a:pPr algn="l"/>
             <a:r>
               <a:rPr lang="en-US" sz="6000" dirty="0" smtClean="0"/>
-              <a:t>3 </a:t>
+              <a:t>The </a:t>
             </a:r>
             <a:r>
               <a:rPr lang="en-US" sz="6000" dirty="0" smtClean="0"/>
-              <a:t>Types of Storm We Could </a:t>
+              <a:t>Truth </a:t>
             </a:r>
             <a:r>
               <a:rPr lang="en-US" sz="6000" dirty="0" smtClean="0"/>
-              <a:t>Experience</a:t>
+              <a:t>about storms</a:t>
             </a:r>
             <a:endParaRPr lang="en-US" sz="6000" dirty="0"/>
+          </a:p>
+        </p:txBody>
+      </p:sp>
+      <p:sp>
+        <p:nvSpPr>
+          <p:cNvPr id="6" name="TextBox 5"/>
+          <p:cNvSpPr txBox="1"/>
+          <p:nvPr/>
+        </p:nvSpPr>
+        <p:spPr>
+          <a:xfrm>
+            <a:off x="1219200" y="2430959"/>
+            <a:ext cx="6248400" cy="769441"/>
+          </a:xfrm>
+          <a:prstGeom prst="rect">
+            <a:avLst/>
+          </a:prstGeom>
+          <a:noFill/>
+        </p:spPr>
+        <p:txBody>
+          <a:bodyPr wrap="square" rtlCol="0">
+            <a:spAutoFit/>
+          </a:bodyPr>
+          <a:lstStyle/>
+          <a:p>
+            <a:r>
+              <a:rPr lang="en-US" sz="4400" b="1" dirty="0" smtClean="0"/>
+              <a:t>No body is exempted</a:t>
+            </a:r>
+            <a:endParaRPr lang="en-US" sz="4400" b="1" dirty="0"/>
+          </a:p>
+        </p:txBody>
+      </p:sp>
+      <p:sp>
+        <p:nvSpPr>
+          <p:cNvPr id="7" name="TextBox 6"/>
+          <p:cNvSpPr txBox="1"/>
+          <p:nvPr/>
+        </p:nvSpPr>
+        <p:spPr>
+          <a:xfrm>
+            <a:off x="1219200" y="3269159"/>
+            <a:ext cx="6248400" cy="769441"/>
+          </a:xfrm>
+          <a:prstGeom prst="rect">
+            <a:avLst/>
+          </a:prstGeom>
+          <a:noFill/>
+        </p:spPr>
+        <p:txBody>
+          <a:bodyPr wrap="square" rtlCol="0">
+            <a:spAutoFit/>
+          </a:bodyPr>
+          <a:lstStyle/>
+          <a:p>
+            <a:r>
+              <a:rPr lang="en-US" sz="4400" b="1" dirty="0" smtClean="0"/>
+              <a:t>It will always come</a:t>
+            </a:r>
+            <a:endParaRPr lang="en-US" sz="4400" b="1" dirty="0"/>
+          </a:p>
+        </p:txBody>
+      </p:sp>
+      <p:sp>
+        <p:nvSpPr>
+          <p:cNvPr id="8" name="TextBox 7"/>
+          <p:cNvSpPr txBox="1"/>
+          <p:nvPr/>
+        </p:nvSpPr>
+        <p:spPr>
+          <a:xfrm>
+            <a:off x="1219200" y="4031159"/>
+            <a:ext cx="6553200" cy="1446550"/>
+          </a:xfrm>
+          <a:prstGeom prst="rect">
+            <a:avLst/>
+          </a:prstGeom>
+          <a:noFill/>
+        </p:spPr>
+        <p:txBody>
+          <a:bodyPr wrap="square" rtlCol="0">
+            <a:spAutoFit/>
+          </a:bodyPr>
+          <a:lstStyle/>
+          <a:p>
+            <a:r>
+              <a:rPr lang="en-US" sz="4400" b="1" dirty="0" smtClean="0"/>
+              <a:t>It </a:t>
+            </a:r>
+            <a:r>
+              <a:rPr lang="en-US" sz="4400" b="1" dirty="0" smtClean="0"/>
+              <a:t>reveals </a:t>
+            </a:r>
+            <a:r>
+              <a:rPr lang="en-US" sz="4400" b="1" dirty="0" smtClean="0"/>
+              <a:t>something in us</a:t>
+            </a:r>
+            <a:endParaRPr lang="en-US" sz="4400" b="1" dirty="0"/>
           </a:p>
         </p:txBody>
       </p:sp>
     </p:spTree>
     <p:extLst>
       <p:ext uri="{BB962C8B-B14F-4D97-AF65-F5344CB8AC3E}">
-        <p14:creationId xmlns:p14="http://schemas.microsoft.com/office/powerpoint/2010/main" val="913881702"/>
+        <p14:creationId xmlns:p14="http://schemas.microsoft.com/office/powerpoint/2010/main" xmlns="" val="1944061836"/>
       </p:ext>
     </p:extLst>
   </p:cSld>
@@ -3718,7 +4036,7 @@
 </p:sld>
 </file>
 
-<file path=ppt/slides/slide4.xml><?xml version="1.0" encoding="utf-8"?>
+<file path=ppt/slides/slide3.xml><?xml version="1.0" encoding="utf-8"?>
 <p:sld xmlns:a="http://schemas.openxmlformats.org/drawingml/2006/main" xmlns:r="http://schemas.openxmlformats.org/officeDocument/2006/relationships" xmlns:p="http://schemas.openxmlformats.org/presentationml/2006/main">
   <p:cSld>
     <p:spTree>
@@ -3737,7 +4055,7 @@
       </p:grpSpPr>
       <p:pic>
         <p:nvPicPr>
-          <p:cNvPr id="2" name="Picture 2" descr="D:\Google Drive\ekklesia\DEV\960x01.jpg"/>
+          <p:cNvPr id="1026" name="Picture 2" descr="D:\Google Drive\ekklesia\DEV\960x0.jpg"/>
           <p:cNvPicPr>
             <a:picLocks noChangeAspect="1" noChangeArrowheads="1"/>
           </p:cNvPicPr>
@@ -3747,7 +4065,7 @@
           <a:blip r:embed="rId2">
             <a:extLst>
               <a:ext uri="{28A0092B-C50C-407E-A947-70E740481C1C}">
-                <a14:useLocalDpi xmlns:a14="http://schemas.microsoft.com/office/drawing/2010/main" val="0"/>
+                <a14:useLocalDpi xmlns:a14="http://schemas.microsoft.com/office/drawing/2010/main" xmlns="" val="0"/>
               </a:ext>
             </a:extLst>
           </a:blip>
@@ -3758,8 +4076,8 @@
         </p:blipFill>
         <p:spPr bwMode="auto">
           <a:xfrm>
-            <a:off x="-90056" y="0"/>
-            <a:ext cx="9144000" cy="1933575"/>
+            <a:off x="-609600" y="-6927"/>
+            <a:ext cx="10113178" cy="6858000"/>
           </a:xfrm>
           <a:prstGeom prst="rect">
             <a:avLst/>
@@ -3767,7 +4085,7 @@
           <a:noFill/>
           <a:extLst>
             <a:ext uri="{909E8E84-426E-40DD-AFC4-6F175D3DCCD1}">
-              <a14:hiddenFill xmlns:a14="http://schemas.microsoft.com/office/drawing/2010/main">
+              <a14:hiddenFill xmlns:a14="http://schemas.microsoft.com/office/drawing/2010/main" xmlns="">
                 <a:solidFill>
                   <a:srgbClr val="FFFFFF"/>
                 </a:solidFill>
@@ -3855,70 +4173,24 @@
           <a:p>
             <a:r>
               <a:rPr lang="en-US" sz="6000" dirty="0" smtClean="0"/>
-              <a:t>1. The storm of Testing</a:t>
-            </a:r>
-          </a:p>
-          <a:p>
+              <a:t>3 Types of Storm </a:t>
+            </a:r>
+            <a:r>
+              <a:rPr lang="en-US" sz="6000" dirty="0" smtClean="0"/>
+              <a:t>that we </a:t>
+            </a:r>
+            <a:r>
+              <a:rPr lang="en-US" sz="6000" dirty="0" smtClean="0"/>
+              <a:t>Could Experience</a:t>
+            </a:r>
             <a:endParaRPr lang="en-US" sz="6000" dirty="0"/>
-          </a:p>
-        </p:txBody>
-      </p:sp>
-      <p:sp>
-        <p:nvSpPr>
-          <p:cNvPr id="4" name="TextBox 3"/>
-          <p:cNvSpPr txBox="1"/>
-          <p:nvPr/>
-        </p:nvSpPr>
-        <p:spPr>
-          <a:xfrm>
-            <a:off x="124690" y="2209800"/>
-            <a:ext cx="8714509" cy="3416320"/>
-          </a:xfrm>
-          <a:prstGeom prst="rect">
-            <a:avLst/>
-          </a:prstGeom>
-          <a:noFill/>
-        </p:spPr>
-        <p:txBody>
-          <a:bodyPr wrap="square" rtlCol="0">
-            <a:spAutoFit/>
-          </a:bodyPr>
-          <a:lstStyle/>
-          <a:p>
-            <a:r>
-              <a:rPr lang="en-US" sz="3600" b="1" dirty="0" smtClean="0"/>
-              <a:t>James 1:2-3 </a:t>
-            </a:r>
-            <a:r>
-              <a:rPr lang="en-US" sz="3600" b="1" dirty="0"/>
-              <a:t>NIV</a:t>
-            </a:r>
-            <a:r>
-              <a:rPr lang="en-US" sz="3600" b="1" dirty="0"/>
-              <a:t/>
-            </a:r>
-            <a:br>
-              <a:rPr lang="en-US" sz="3600" b="1" dirty="0"/>
-            </a:br>
-            <a:r>
-              <a:rPr lang="en-US" sz="3600" b="1" dirty="0"/>
-              <a:t/>
-            </a:r>
-            <a:br>
-              <a:rPr lang="en-US" sz="3600" b="1" dirty="0"/>
-            </a:br>
-            <a:r>
-              <a:rPr lang="en-US" sz="3600" b="1" dirty="0"/>
-              <a:t>Consider it pure joy, my brothers and sisters, whenever you face trials of many kinds, because you know that the testing of your faith produces perseverance.</a:t>
-            </a:r>
-            <a:endParaRPr lang="en-US" sz="3600" b="1" dirty="0"/>
           </a:p>
         </p:txBody>
       </p:sp>
     </p:spTree>
     <p:extLst>
       <p:ext uri="{BB962C8B-B14F-4D97-AF65-F5344CB8AC3E}">
-        <p14:creationId xmlns:p14="http://schemas.microsoft.com/office/powerpoint/2010/main" val="2859836105"/>
+        <p14:creationId xmlns:p14="http://schemas.microsoft.com/office/powerpoint/2010/main" xmlns="" val="913881702"/>
       </p:ext>
     </p:extLst>
   </p:cSld>
@@ -3935,217 +4207,7 @@
 </p:sld>
 </file>
 
-<file path=ppt/slides/slide5.xml><?xml version="1.0" encoding="utf-8"?>
-<p:sld xmlns:a="http://schemas.openxmlformats.org/drawingml/2006/main" xmlns:r="http://schemas.openxmlformats.org/officeDocument/2006/relationships" xmlns:p="http://schemas.openxmlformats.org/presentationml/2006/main">
-  <p:cSld>
-    <p:spTree>
-      <p:nvGrpSpPr>
-        <p:cNvPr id="1" name=""/>
-        <p:cNvGrpSpPr/>
-        <p:nvPr/>
-      </p:nvGrpSpPr>
-      <p:grpSpPr>
-        <a:xfrm>
-          <a:off x="0" y="0"/>
-          <a:ext cx="0" cy="0"/>
-          <a:chOff x="0" y="0"/>
-          <a:chExt cx="0" cy="0"/>
-        </a:xfrm>
-      </p:grpSpPr>
-      <p:sp>
-        <p:nvSpPr>
-          <p:cNvPr id="2" name="Title 1"/>
-          <p:cNvSpPr>
-            <a:spLocks noGrp="1"/>
-          </p:cNvSpPr>
-          <p:nvPr>
-            <p:ph type="title"/>
-          </p:nvPr>
-        </p:nvSpPr>
-        <p:spPr/>
-        <p:txBody>
-          <a:bodyPr/>
-          <a:lstStyle/>
-          <a:p>
-            <a:pPr algn="l"/>
-            <a:r>
-              <a:rPr lang="en-US" dirty="0" smtClean="0"/>
-              <a:t>2. </a:t>
-            </a:r>
-            <a:r>
-              <a:rPr lang="en-US" dirty="0"/>
-              <a:t>Storm of Disobedient</a:t>
-            </a:r>
-          </a:p>
-        </p:txBody>
-      </p:sp>
-      <p:pic>
-        <p:nvPicPr>
-          <p:cNvPr id="3074" name="Picture 2" descr="D:\Google Drive\ekklesia\DEV\1102013259_univ_cnt_2_xl.jpg"/>
-          <p:cNvPicPr>
-            <a:picLocks noChangeAspect="1" noChangeArrowheads="1"/>
-          </p:cNvPicPr>
-          <p:nvPr/>
-        </p:nvPicPr>
-        <p:blipFill>
-          <a:blip r:embed="rId2">
-            <a:extLst>
-              <a:ext uri="{28A0092B-C50C-407E-A947-70E740481C1C}">
-                <a14:useLocalDpi xmlns:a14="http://schemas.microsoft.com/office/drawing/2010/main" val="0"/>
-              </a:ext>
-            </a:extLst>
-          </a:blip>
-          <a:srcRect/>
-          <a:stretch>
-            <a:fillRect/>
-          </a:stretch>
-        </p:blipFill>
-        <p:spPr bwMode="auto">
-          <a:xfrm>
-            <a:off x="381000" y="1181100"/>
-            <a:ext cx="8572500" cy="5143500"/>
-          </a:xfrm>
-          <a:prstGeom prst="rect">
-            <a:avLst/>
-          </a:prstGeom>
-          <a:noFill/>
-          <a:extLst>
-            <a:ext uri="{909E8E84-426E-40DD-AFC4-6F175D3DCCD1}">
-              <a14:hiddenFill xmlns:a14="http://schemas.microsoft.com/office/drawing/2010/main">
-                <a:solidFill>
-                  <a:srgbClr val="FFFFFF"/>
-                </a:solidFill>
-              </a14:hiddenFill>
-            </a:ext>
-          </a:extLst>
-        </p:spPr>
-      </p:pic>
-    </p:spTree>
-    <p:extLst>
-      <p:ext uri="{BB962C8B-B14F-4D97-AF65-F5344CB8AC3E}">
-        <p14:creationId xmlns:p14="http://schemas.microsoft.com/office/powerpoint/2010/main" val="946158105"/>
-      </p:ext>
-    </p:extLst>
-  </p:cSld>
-  <p:clrMapOvr>
-    <a:masterClrMapping/>
-  </p:clrMapOvr>
-  <p:timing>
-    <p:tnLst>
-      <p:par>
-        <p:cTn id="1" dur="indefinite" restart="never" nodeType="tmRoot"/>
-      </p:par>
-    </p:tnLst>
-  </p:timing>
-</p:sld>
-</file>
-
-<file path=ppt/slides/slide6.xml><?xml version="1.0" encoding="utf-8"?>
-<p:sld xmlns:a="http://schemas.openxmlformats.org/drawingml/2006/main" xmlns:r="http://schemas.openxmlformats.org/officeDocument/2006/relationships" xmlns:p="http://schemas.openxmlformats.org/presentationml/2006/main">
-  <p:cSld>
-    <p:spTree>
-      <p:nvGrpSpPr>
-        <p:cNvPr id="1" name=""/>
-        <p:cNvGrpSpPr/>
-        <p:nvPr/>
-      </p:nvGrpSpPr>
-      <p:grpSpPr>
-        <a:xfrm>
-          <a:off x="0" y="0"/>
-          <a:ext cx="0" cy="0"/>
-          <a:chOff x="0" y="0"/>
-          <a:chExt cx="0" cy="0"/>
-        </a:xfrm>
-      </p:grpSpPr>
-      <p:sp>
-        <p:nvSpPr>
-          <p:cNvPr id="2" name="Title 1"/>
-          <p:cNvSpPr>
-            <a:spLocks noGrp="1"/>
-          </p:cNvSpPr>
-          <p:nvPr>
-            <p:ph type="title"/>
-          </p:nvPr>
-        </p:nvSpPr>
-        <p:spPr/>
-        <p:txBody>
-          <a:bodyPr/>
-          <a:lstStyle/>
-          <a:p>
-            <a:pPr algn="l"/>
-            <a:r>
-              <a:rPr lang="en-US" dirty="0" smtClean="0"/>
-              <a:t>3. </a:t>
-            </a:r>
-            <a:r>
-              <a:rPr lang="en-US" dirty="0"/>
-              <a:t>Storm of Obedient</a:t>
-            </a:r>
-          </a:p>
-        </p:txBody>
-      </p:sp>
-      <p:pic>
-        <p:nvPicPr>
-          <p:cNvPr id="4098" name="Picture 2" descr="D:\Google Drive\ekklesia\DEV\Walk-By-Faith-Jesus-Walking-on-Water-Peter-Walking-on-Water-Matthew-14.jpg"/>
-          <p:cNvPicPr>
-            <a:picLocks noChangeAspect="1" noChangeArrowheads="1"/>
-          </p:cNvPicPr>
-          <p:nvPr/>
-        </p:nvPicPr>
-        <p:blipFill>
-          <a:blip r:embed="rId2">
-            <a:extLst>
-              <a:ext uri="{28A0092B-C50C-407E-A947-70E740481C1C}">
-                <a14:useLocalDpi xmlns:a14="http://schemas.microsoft.com/office/drawing/2010/main" val="0"/>
-              </a:ext>
-            </a:extLst>
-          </a:blip>
-          <a:srcRect/>
-          <a:stretch>
-            <a:fillRect/>
-          </a:stretch>
-        </p:blipFill>
-        <p:spPr bwMode="auto">
-          <a:xfrm>
-            <a:off x="228600" y="1229644"/>
-            <a:ext cx="8458200" cy="6237956"/>
-          </a:xfrm>
-          <a:prstGeom prst="rect">
-            <a:avLst/>
-          </a:prstGeom>
-          <a:noFill/>
-          <a:extLst>
-            <a:ext uri="{909E8E84-426E-40DD-AFC4-6F175D3DCCD1}">
-              <a14:hiddenFill xmlns:a14="http://schemas.microsoft.com/office/drawing/2010/main">
-                <a:solidFill>
-                  <a:srgbClr val="FFFFFF"/>
-                </a:solidFill>
-              </a14:hiddenFill>
-            </a:ext>
-          </a:extLst>
-        </p:spPr>
-      </p:pic>
-    </p:spTree>
-    <p:extLst>
-      <p:ext uri="{BB962C8B-B14F-4D97-AF65-F5344CB8AC3E}">
-        <p14:creationId xmlns:p14="http://schemas.microsoft.com/office/powerpoint/2010/main" val="844597279"/>
-      </p:ext>
-    </p:extLst>
-  </p:cSld>
-  <p:clrMapOvr>
-    <a:masterClrMapping/>
-  </p:clrMapOvr>
-  <p:timing>
-    <p:tnLst>
-      <p:par>
-        <p:cTn id="1" dur="indefinite" restart="never" nodeType="tmRoot"/>
-      </p:par>
-    </p:tnLst>
-  </p:timing>
-</p:sld>
-</file>
-
-<file path=ppt/slides/slide7.xml><?xml version="1.0" encoding="utf-8"?>
+<file path=ppt/slides/slide4.xml><?xml version="1.0" encoding="utf-8"?>
 <p:sld xmlns:a="http://schemas.openxmlformats.org/drawingml/2006/main" xmlns:r="http://schemas.openxmlformats.org/officeDocument/2006/relationships" xmlns:p="http://schemas.openxmlformats.org/presentationml/2006/main">
   <p:cSld>
     <p:spTree>
@@ -4164,7 +4226,7 @@
       </p:grpSpPr>
       <p:pic>
         <p:nvPicPr>
-          <p:cNvPr id="5122" name="Picture 2" descr="D:\Google Drive\ekklesia\DEV\maxresdefault.jpg"/>
+          <p:cNvPr id="2" name="Picture 2" descr="D:\Google Drive\ekklesia\DEV\960x01.jpg"/>
           <p:cNvPicPr>
             <a:picLocks noChangeAspect="1" noChangeArrowheads="1"/>
           </p:cNvPicPr>
@@ -4174,7 +4236,7 @@
           <a:blip r:embed="rId2">
             <a:extLst>
               <a:ext uri="{28A0092B-C50C-407E-A947-70E740481C1C}">
-                <a14:useLocalDpi xmlns:a14="http://schemas.microsoft.com/office/drawing/2010/main" val="0"/>
+                <a14:useLocalDpi xmlns:a14="http://schemas.microsoft.com/office/drawing/2010/main" xmlns="" val="0"/>
               </a:ext>
             </a:extLst>
           </a:blip>
@@ -4185,8 +4247,8 @@
         </p:blipFill>
         <p:spPr bwMode="auto">
           <a:xfrm>
-            <a:off x="0" y="76200"/>
-            <a:ext cx="9144000" cy="6324600"/>
+            <a:off x="-90056" y="0"/>
+            <a:ext cx="9144000" cy="1933575"/>
           </a:xfrm>
           <a:prstGeom prst="rect">
             <a:avLst/>
@@ -4194,7 +4256,7 @@
           <a:noFill/>
           <a:extLst>
             <a:ext uri="{909E8E84-426E-40DD-AFC4-6F175D3DCCD1}">
-              <a14:hiddenFill xmlns:a14="http://schemas.microsoft.com/office/drawing/2010/main">
+              <a14:hiddenFill xmlns:a14="http://schemas.microsoft.com/office/drawing/2010/main" xmlns="">
                 <a:solidFill>
                   <a:srgbClr val="FFFFFF"/>
                 </a:solidFill>
@@ -4213,8 +4275,8 @@
         </p:nvSpPr>
         <p:spPr>
           <a:xfrm>
-            <a:off x="0" y="-304800"/>
-            <a:ext cx="9144000" cy="1828800"/>
+            <a:off x="0" y="609600"/>
+            <a:ext cx="8534400" cy="1828800"/>
           </a:xfrm>
           <a:prstGeom prst="rect">
             <a:avLst/>
@@ -4281,17 +4343,530 @@
           </a:lstStyle>
           <a:p>
             <a:r>
-              <a:rPr lang="en-US" sz="4800" dirty="0" smtClean="0"/>
-              <a:t>Facing The Storm </a:t>
-            </a:r>
-            <a:endParaRPr lang="en-US" sz="4800" dirty="0"/>
+              <a:rPr lang="en-US" sz="6000" dirty="0" smtClean="0"/>
+              <a:t>1. The storm of Testing</a:t>
+            </a:r>
+          </a:p>
+          <a:p>
+            <a:endParaRPr lang="en-US" sz="6000" dirty="0"/>
+          </a:p>
+        </p:txBody>
+      </p:sp>
+      <p:sp>
+        <p:nvSpPr>
+          <p:cNvPr id="4" name="TextBox 3"/>
+          <p:cNvSpPr txBox="1"/>
+          <p:nvPr/>
+        </p:nvSpPr>
+        <p:spPr>
+          <a:xfrm>
+            <a:off x="124690" y="2209800"/>
+            <a:ext cx="8714509" cy="3416320"/>
+          </a:xfrm>
+          <a:prstGeom prst="rect">
+            <a:avLst/>
+          </a:prstGeom>
+          <a:noFill/>
+        </p:spPr>
+        <p:txBody>
+          <a:bodyPr wrap="square" rtlCol="0">
+            <a:spAutoFit/>
+          </a:bodyPr>
+          <a:lstStyle/>
+          <a:p>
+            <a:r>
+              <a:rPr lang="en-US" sz="3600" b="1" dirty="0" smtClean="0"/>
+              <a:t>James 1:2-3 </a:t>
+            </a:r>
+            <a:r>
+              <a:rPr lang="en-US" sz="3600" b="1" dirty="0"/>
+              <a:t>NIV</a:t>
+            </a:r>
+            <a:br>
+              <a:rPr lang="en-US" sz="3600" b="1" dirty="0"/>
+            </a:br>
+            <a:r>
+              <a:rPr lang="en-US" sz="3600" b="1" dirty="0"/>
+              <a:t/>
+            </a:r>
+            <a:br>
+              <a:rPr lang="en-US" sz="3600" b="1" dirty="0"/>
+            </a:br>
+            <a:r>
+              <a:rPr lang="en-US" sz="3600" b="1" dirty="0"/>
+              <a:t>Consider it pure joy, my brothers and sisters, whenever you face trials of many kinds, because you know that the testing of your faith produces perseverance.</a:t>
+            </a:r>
           </a:p>
         </p:txBody>
       </p:sp>
     </p:spTree>
     <p:extLst>
       <p:ext uri="{BB962C8B-B14F-4D97-AF65-F5344CB8AC3E}">
-        <p14:creationId xmlns:p14="http://schemas.microsoft.com/office/powerpoint/2010/main" val="1657937607"/>
+        <p14:creationId xmlns:p14="http://schemas.microsoft.com/office/powerpoint/2010/main" xmlns="" val="2859836105"/>
+      </p:ext>
+    </p:extLst>
+  </p:cSld>
+  <p:clrMapOvr>
+    <a:masterClrMapping/>
+  </p:clrMapOvr>
+  <p:timing>
+    <p:tnLst>
+      <p:par>
+        <p:cTn id="1" dur="indefinite" restart="never" nodeType="tmRoot"/>
+      </p:par>
+    </p:tnLst>
+  </p:timing>
+</p:sld>
+</file>
+
+<file path=ppt/slides/slide5.xml><?xml version="1.0" encoding="utf-8"?>
+<p:sld xmlns:a="http://schemas.openxmlformats.org/drawingml/2006/main" xmlns:r="http://schemas.openxmlformats.org/officeDocument/2006/relationships" xmlns:p="http://schemas.openxmlformats.org/presentationml/2006/main">
+  <p:cSld>
+    <p:spTree>
+      <p:nvGrpSpPr>
+        <p:cNvPr id="1" name=""/>
+        <p:cNvGrpSpPr/>
+        <p:nvPr/>
+      </p:nvGrpSpPr>
+      <p:grpSpPr>
+        <a:xfrm>
+          <a:off x="0" y="0"/>
+          <a:ext cx="0" cy="0"/>
+          <a:chOff x="0" y="0"/>
+          <a:chExt cx="0" cy="0"/>
+        </a:xfrm>
+      </p:grpSpPr>
+      <p:pic>
+        <p:nvPicPr>
+          <p:cNvPr id="4" name="Picture 2" descr="D:\Google Drive\ekklesia\DEV\960x01.jpg"/>
+          <p:cNvPicPr>
+            <a:picLocks noChangeAspect="1" noChangeArrowheads="1"/>
+          </p:cNvPicPr>
+          <p:nvPr/>
+        </p:nvPicPr>
+        <p:blipFill>
+          <a:blip r:embed="rId2">
+            <a:extLst>
+              <a:ext uri="{28A0092B-C50C-407E-A947-70E740481C1C}">
+                <a14:useLocalDpi xmlns:a14="http://schemas.microsoft.com/office/drawing/2010/main" xmlns="" val="0"/>
+              </a:ext>
+            </a:extLst>
+          </a:blip>
+          <a:srcRect/>
+          <a:stretch>
+            <a:fillRect/>
+          </a:stretch>
+        </p:blipFill>
+        <p:spPr bwMode="auto">
+          <a:xfrm>
+            <a:off x="0" y="0"/>
+            <a:ext cx="9144000" cy="1933575"/>
+          </a:xfrm>
+          <a:prstGeom prst="rect">
+            <a:avLst/>
+          </a:prstGeom>
+          <a:noFill/>
+          <a:extLst>
+            <a:ext uri="{909E8E84-426E-40DD-AFC4-6F175D3DCCD1}">
+              <a14:hiddenFill xmlns:a14="http://schemas.microsoft.com/office/drawing/2010/main" xmlns="">
+                <a:solidFill>
+                  <a:srgbClr val="FFFFFF"/>
+                </a:solidFill>
+              </a14:hiddenFill>
+            </a:ext>
+          </a:extLst>
+        </p:spPr>
+      </p:pic>
+      <p:sp>
+        <p:nvSpPr>
+          <p:cNvPr id="2" name="Title 1"/>
+          <p:cNvSpPr>
+            <a:spLocks noGrp="1"/>
+          </p:cNvSpPr>
+          <p:nvPr>
+            <p:ph type="title"/>
+          </p:nvPr>
+        </p:nvSpPr>
+        <p:spPr/>
+        <p:txBody>
+          <a:bodyPr/>
+          <a:lstStyle/>
+          <a:p>
+            <a:pPr algn="l"/>
+            <a:r>
+              <a:rPr lang="en-US" dirty="0" smtClean="0"/>
+              <a:t>2. </a:t>
+            </a:r>
+            <a:r>
+              <a:rPr lang="en-US" dirty="0"/>
+              <a:t>Storm of Disobedient</a:t>
+            </a:r>
+          </a:p>
+        </p:txBody>
+      </p:sp>
+      <p:sp>
+        <p:nvSpPr>
+          <p:cNvPr id="5" name="TextBox 4"/>
+          <p:cNvSpPr txBox="1"/>
+          <p:nvPr/>
+        </p:nvSpPr>
+        <p:spPr>
+          <a:xfrm>
+            <a:off x="152400" y="2057400"/>
+            <a:ext cx="8714509" cy="5262979"/>
+          </a:xfrm>
+          <a:prstGeom prst="rect">
+            <a:avLst/>
+          </a:prstGeom>
+          <a:noFill/>
+        </p:spPr>
+        <p:txBody>
+          <a:bodyPr wrap="square" rtlCol="0">
+            <a:spAutoFit/>
+          </a:bodyPr>
+          <a:lstStyle/>
+          <a:p>
+            <a:r>
+              <a:rPr lang="en-US" sz="3600" dirty="0" smtClean="0"/>
+              <a:t>Jonah </a:t>
+            </a:r>
+            <a:r>
+              <a:rPr lang="en-US" sz="3600" dirty="0" smtClean="0"/>
+              <a:t>1:4-5 </a:t>
+            </a:r>
+            <a:r>
+              <a:rPr lang="en-US" sz="3600" dirty="0" smtClean="0"/>
+              <a:t>NIV</a:t>
+            </a:r>
+            <a:br>
+              <a:rPr lang="en-US" sz="3600" dirty="0" smtClean="0"/>
+            </a:br>
+            <a:r>
+              <a:rPr lang="en-US" sz="3600" dirty="0" smtClean="0"/>
+              <a:t/>
+            </a:r>
+            <a:br>
+              <a:rPr lang="en-US" sz="3600" dirty="0" smtClean="0"/>
+            </a:br>
+            <a:r>
+              <a:rPr lang="en-US" sz="3200" dirty="0" smtClean="0"/>
+              <a:t>Then the Lord sent a great wind on the sea, and such a violent storm arose that the ship threatened to break up. All the sailors were afraid and each cried out to his own god. And they threw the cargo into the sea to lighten the ship. But Jonah had gone below deck, where he lay down and fell into a deep sleep</a:t>
+            </a:r>
+            <a:r>
+              <a:rPr lang="en-US" sz="3600" dirty="0" smtClean="0"/>
+              <a:t>.</a:t>
+            </a:r>
+            <a:br>
+              <a:rPr lang="en-US" sz="3600" dirty="0" smtClean="0"/>
+            </a:br>
+            <a:endParaRPr lang="en-US" sz="3600" b="1" dirty="0"/>
+          </a:p>
+        </p:txBody>
+      </p:sp>
+    </p:spTree>
+    <p:extLst>
+      <p:ext uri="{BB962C8B-B14F-4D97-AF65-F5344CB8AC3E}">
+        <p14:creationId xmlns:p14="http://schemas.microsoft.com/office/powerpoint/2010/main" xmlns="" val="946158105"/>
+      </p:ext>
+    </p:extLst>
+  </p:cSld>
+  <p:clrMapOvr>
+    <a:masterClrMapping/>
+  </p:clrMapOvr>
+  <p:timing>
+    <p:tnLst>
+      <p:par>
+        <p:cTn id="1" dur="indefinite" restart="never" nodeType="tmRoot"/>
+      </p:par>
+    </p:tnLst>
+  </p:timing>
+</p:sld>
+</file>
+
+<file path=ppt/slides/slide6.xml><?xml version="1.0" encoding="utf-8"?>
+<p:sld xmlns:a="http://schemas.openxmlformats.org/drawingml/2006/main" xmlns:r="http://schemas.openxmlformats.org/officeDocument/2006/relationships" xmlns:p="http://schemas.openxmlformats.org/presentationml/2006/main">
+  <p:cSld>
+    <p:spTree>
+      <p:nvGrpSpPr>
+        <p:cNvPr id="1" name=""/>
+        <p:cNvGrpSpPr/>
+        <p:nvPr/>
+      </p:nvGrpSpPr>
+      <p:grpSpPr>
+        <a:xfrm>
+          <a:off x="0" y="0"/>
+          <a:ext cx="0" cy="0"/>
+          <a:chOff x="0" y="0"/>
+          <a:chExt cx="0" cy="0"/>
+        </a:xfrm>
+      </p:grpSpPr>
+      <p:pic>
+        <p:nvPicPr>
+          <p:cNvPr id="4" name="Picture 2" descr="D:\Google Drive\ekklesia\DEV\960x01.jpg"/>
+          <p:cNvPicPr>
+            <a:picLocks noChangeAspect="1" noChangeArrowheads="1"/>
+          </p:cNvPicPr>
+          <p:nvPr/>
+        </p:nvPicPr>
+        <p:blipFill>
+          <a:blip r:embed="rId2">
+            <a:extLst>
+              <a:ext uri="{28A0092B-C50C-407E-A947-70E740481C1C}">
+                <a14:useLocalDpi xmlns:a14="http://schemas.microsoft.com/office/drawing/2010/main" xmlns="" val="0"/>
+              </a:ext>
+            </a:extLst>
+          </a:blip>
+          <a:srcRect/>
+          <a:stretch>
+            <a:fillRect/>
+          </a:stretch>
+        </p:blipFill>
+        <p:spPr bwMode="auto">
+          <a:xfrm>
+            <a:off x="0" y="0"/>
+            <a:ext cx="9144000" cy="1933575"/>
+          </a:xfrm>
+          <a:prstGeom prst="rect">
+            <a:avLst/>
+          </a:prstGeom>
+          <a:noFill/>
+          <a:extLst>
+            <a:ext uri="{909E8E84-426E-40DD-AFC4-6F175D3DCCD1}">
+              <a14:hiddenFill xmlns:a14="http://schemas.microsoft.com/office/drawing/2010/main" xmlns="">
+                <a:solidFill>
+                  <a:srgbClr val="FFFFFF"/>
+                </a:solidFill>
+              </a14:hiddenFill>
+            </a:ext>
+          </a:extLst>
+        </p:spPr>
+      </p:pic>
+      <p:sp>
+        <p:nvSpPr>
+          <p:cNvPr id="2" name="Title 1"/>
+          <p:cNvSpPr>
+            <a:spLocks noGrp="1"/>
+          </p:cNvSpPr>
+          <p:nvPr>
+            <p:ph type="title"/>
+          </p:nvPr>
+        </p:nvSpPr>
+        <p:spPr/>
+        <p:txBody>
+          <a:bodyPr/>
+          <a:lstStyle/>
+          <a:p>
+            <a:pPr algn="l"/>
+            <a:r>
+              <a:rPr lang="en-US" dirty="0" smtClean="0"/>
+              <a:t>3. </a:t>
+            </a:r>
+            <a:r>
+              <a:rPr lang="en-US" dirty="0"/>
+              <a:t>Storm of Obedient</a:t>
+            </a:r>
+          </a:p>
+        </p:txBody>
+      </p:sp>
+      <p:sp>
+        <p:nvSpPr>
+          <p:cNvPr id="5" name="TextBox 4"/>
+          <p:cNvSpPr txBox="1"/>
+          <p:nvPr/>
+        </p:nvSpPr>
+        <p:spPr>
+          <a:xfrm>
+            <a:off x="152400" y="2057400"/>
+            <a:ext cx="8714509" cy="2862322"/>
+          </a:xfrm>
+          <a:prstGeom prst="rect">
+            <a:avLst/>
+          </a:prstGeom>
+          <a:noFill/>
+        </p:spPr>
+        <p:txBody>
+          <a:bodyPr wrap="square" rtlCol="0">
+            <a:spAutoFit/>
+          </a:bodyPr>
+          <a:lstStyle/>
+          <a:p>
+            <a:r>
+              <a:rPr lang="en-US" sz="3600" dirty="0" smtClean="0"/>
+              <a:t>Mark 4:35 </a:t>
+            </a:r>
+            <a:r>
+              <a:rPr lang="en-US" sz="3600" dirty="0" smtClean="0"/>
+              <a:t>NIV</a:t>
+            </a:r>
+          </a:p>
+          <a:p>
+            <a:endParaRPr lang="en-US" sz="3600" dirty="0" smtClean="0"/>
+          </a:p>
+          <a:p>
+            <a:r>
+              <a:rPr lang="en-US" sz="3600" dirty="0" smtClean="0"/>
+              <a:t>That day when evening came, he said to his disciples, “Let us go over to the other side.”</a:t>
+            </a:r>
+            <a:endParaRPr lang="en-US" sz="3600" b="1" dirty="0"/>
+          </a:p>
+        </p:txBody>
+      </p:sp>
+    </p:spTree>
+    <p:extLst>
+      <p:ext uri="{BB962C8B-B14F-4D97-AF65-F5344CB8AC3E}">
+        <p14:creationId xmlns:p14="http://schemas.microsoft.com/office/powerpoint/2010/main" xmlns="" val="844597279"/>
+      </p:ext>
+    </p:extLst>
+  </p:cSld>
+  <p:clrMapOvr>
+    <a:masterClrMapping/>
+  </p:clrMapOvr>
+  <p:timing>
+    <p:tnLst>
+      <p:par>
+        <p:cTn id="1" dur="indefinite" restart="never" nodeType="tmRoot"/>
+      </p:par>
+    </p:tnLst>
+  </p:timing>
+</p:sld>
+</file>
+
+<file path=ppt/slides/slide7.xml><?xml version="1.0" encoding="utf-8"?>
+<p:sld xmlns:a="http://schemas.openxmlformats.org/drawingml/2006/main" xmlns:r="http://schemas.openxmlformats.org/officeDocument/2006/relationships" xmlns:p="http://schemas.openxmlformats.org/presentationml/2006/main">
+  <p:cSld>
+    <p:spTree>
+      <p:nvGrpSpPr>
+        <p:cNvPr id="1" name=""/>
+        <p:cNvGrpSpPr/>
+        <p:nvPr/>
+      </p:nvGrpSpPr>
+      <p:grpSpPr>
+        <a:xfrm>
+          <a:off x="0" y="0"/>
+          <a:ext cx="0" cy="0"/>
+          <a:chOff x="0" y="0"/>
+          <a:chExt cx="0" cy="0"/>
+        </a:xfrm>
+      </p:grpSpPr>
+      <p:pic>
+        <p:nvPicPr>
+          <p:cNvPr id="4" name="Picture 2" descr="D:\Google Drive\ekklesia\DEV\960x01.jpg"/>
+          <p:cNvPicPr>
+            <a:picLocks noChangeAspect="1" noChangeArrowheads="1"/>
+          </p:cNvPicPr>
+          <p:nvPr/>
+        </p:nvPicPr>
+        <p:blipFill>
+          <a:blip r:embed="rId2">
+            <a:extLst>
+              <a:ext uri="{28A0092B-C50C-407E-A947-70E740481C1C}">
+                <a14:useLocalDpi xmlns:a14="http://schemas.microsoft.com/office/drawing/2010/main" xmlns="" val="0"/>
+              </a:ext>
+            </a:extLst>
+          </a:blip>
+          <a:srcRect/>
+          <a:stretch>
+            <a:fillRect/>
+          </a:stretch>
+        </p:blipFill>
+        <p:spPr bwMode="auto">
+          <a:xfrm>
+            <a:off x="0" y="0"/>
+            <a:ext cx="9144000" cy="1933575"/>
+          </a:xfrm>
+          <a:prstGeom prst="rect">
+            <a:avLst/>
+          </a:prstGeom>
+          <a:noFill/>
+          <a:extLst>
+            <a:ext uri="{909E8E84-426E-40DD-AFC4-6F175D3DCCD1}">
+              <a14:hiddenFill xmlns:a14="http://schemas.microsoft.com/office/drawing/2010/main" xmlns="">
+                <a:solidFill>
+                  <a:srgbClr val="FFFFFF"/>
+                </a:solidFill>
+              </a14:hiddenFill>
+            </a:ext>
+          </a:extLst>
+        </p:spPr>
+      </p:pic>
+      <p:sp>
+        <p:nvSpPr>
+          <p:cNvPr id="2" name="Title 1"/>
+          <p:cNvSpPr>
+            <a:spLocks noGrp="1"/>
+          </p:cNvSpPr>
+          <p:nvPr>
+            <p:ph type="title"/>
+          </p:nvPr>
+        </p:nvSpPr>
+        <p:spPr/>
+        <p:txBody>
+          <a:bodyPr/>
+          <a:lstStyle/>
+          <a:p>
+            <a:pPr algn="l"/>
+            <a:r>
+              <a:rPr lang="en-US" dirty="0" smtClean="0"/>
+              <a:t>3. </a:t>
+            </a:r>
+            <a:r>
+              <a:rPr lang="en-US" dirty="0"/>
+              <a:t>Storm of Obedient</a:t>
+            </a:r>
+          </a:p>
+        </p:txBody>
+      </p:sp>
+      <p:sp>
+        <p:nvSpPr>
+          <p:cNvPr id="5" name="TextBox 4"/>
+          <p:cNvSpPr txBox="1"/>
+          <p:nvPr/>
+        </p:nvSpPr>
+        <p:spPr>
+          <a:xfrm>
+            <a:off x="152400" y="2057400"/>
+            <a:ext cx="8714509" cy="3416320"/>
+          </a:xfrm>
+          <a:prstGeom prst="rect">
+            <a:avLst/>
+          </a:prstGeom>
+          <a:noFill/>
+        </p:spPr>
+        <p:txBody>
+          <a:bodyPr wrap="square" rtlCol="0">
+            <a:spAutoFit/>
+          </a:bodyPr>
+          <a:lstStyle/>
+          <a:p>
+            <a:r>
+              <a:rPr lang="en-US" sz="3600" dirty="0" smtClean="0"/>
+              <a:t>Matthew </a:t>
+            </a:r>
+            <a:r>
+              <a:rPr lang="en-US" sz="3600" dirty="0" smtClean="0"/>
+              <a:t>14:22 </a:t>
+            </a:r>
+            <a:r>
+              <a:rPr lang="en-US" sz="3600" dirty="0" smtClean="0"/>
+              <a:t>NIV</a:t>
+            </a:r>
+          </a:p>
+          <a:p>
+            <a:endParaRPr lang="en-US" sz="3600" dirty="0" smtClean="0"/>
+          </a:p>
+          <a:p>
+            <a:r>
+              <a:rPr lang="en-US" sz="3600" dirty="0" smtClean="0"/>
+              <a:t>Immediately Jesus made the disciples get into the boat and go on ahead of him to the other side, while he dismissed the crowd.</a:t>
+            </a:r>
+            <a:endParaRPr lang="en-US" sz="3600" b="1" dirty="0"/>
+          </a:p>
+        </p:txBody>
+      </p:sp>
+    </p:spTree>
+    <p:extLst>
+      <p:ext uri="{BB962C8B-B14F-4D97-AF65-F5344CB8AC3E}">
+        <p14:creationId xmlns:p14="http://schemas.microsoft.com/office/powerpoint/2010/main" xmlns="" val="844597279"/>
       </p:ext>
     </p:extLst>
   </p:cSld>
@@ -4327,37 +4902,100 @@
       </p:grpSpPr>
       <p:sp>
         <p:nvSpPr>
-          <p:cNvPr id="2" name="Title 1"/>
-          <p:cNvSpPr>
-            <a:spLocks noGrp="1"/>
-          </p:cNvSpPr>
-          <p:nvPr>
-            <p:ph type="title"/>
-          </p:nvPr>
-        </p:nvSpPr>
-        <p:spPr/>
-        <p:txBody>
-          <a:bodyPr/>
-          <a:lstStyle/>
-          <a:p>
-            <a:r>
-              <a:rPr lang="en-US" dirty="0" smtClean="0"/>
-              <a:t>Facing the storm like an eagle</a:t>
-            </a:r>
-            <a:endParaRPr lang="en-US" dirty="0"/>
-          </a:p>
-        </p:txBody>
-      </p:sp>
-      <p:sp>
-        <p:nvSpPr>
-          <p:cNvPr id="5" name="TextBox 4"/>
+          <p:cNvPr id="5" name="Title 1"/>
+          <p:cNvSpPr txBox="1">
+            <a:spLocks/>
+          </p:cNvSpPr>
+          <p:nvPr/>
+        </p:nvSpPr>
+        <p:spPr>
+          <a:xfrm>
+            <a:off x="0" y="609600"/>
+            <a:ext cx="8534400" cy="1828800"/>
+          </a:xfrm>
+          <a:prstGeom prst="rect">
+            <a:avLst/>
+          </a:prstGeom>
+        </p:spPr>
+        <p:txBody>
+          <a:bodyPr vert="horz" anchor="ctr">
+            <a:noAutofit/>
+            <a:scene3d>
+              <a:camera prst="orthographicFront"/>
+              <a:lightRig rig="soft" dir="t">
+                <a:rot lat="0" lon="0" rev="16800000"/>
+              </a:lightRig>
+            </a:scene3d>
+            <a:sp3d prstMaterial="softEdge">
+              <a:bevelT w="38100" h="38100"/>
+            </a:sp3d>
+          </a:bodyPr>
+          <a:lstStyle>
+            <a:lvl1pPr algn="ctr" rtl="0" eaLnBrk="1" latinLnBrk="0" hangingPunct="1">
+              <a:spcBef>
+                <a:spcPct val="0"/>
+              </a:spcBef>
+              <a:buNone/>
+              <a:defRPr kumimoji="0" sz="4100" b="1" kern="1200" cap="none" baseline="0">
+                <a:ln w="6350">
+                  <a:noFill/>
+                </a:ln>
+                <a:gradFill>
+                  <a:gsLst>
+                    <a:gs pos="0">
+                      <a:schemeClr val="accent1">
+                        <a:tint val="73000"/>
+                        <a:satMod val="145000"/>
+                      </a:schemeClr>
+                    </a:gs>
+                    <a:gs pos="73000">
+                      <a:schemeClr val="accent1">
+                        <a:tint val="73000"/>
+                        <a:satMod val="145000"/>
+                      </a:schemeClr>
+                    </a:gs>
+                    <a:gs pos="100000">
+                      <a:schemeClr val="accent1">
+                        <a:tint val="83000"/>
+                        <a:satMod val="143000"/>
+                      </a:schemeClr>
+                    </a:gs>
+                  </a:gsLst>
+                  <a:lin ang="4800000" scaled="1"/>
+                </a:gradFill>
+                <a:effectLst>
+                  <a:outerShdw blurRad="114300" dist="101600" dir="2700000" algn="tl" rotWithShape="0">
+                    <a:srgbClr val="000000">
+                      <a:alpha val="40000"/>
+                    </a:srgbClr>
+                  </a:outerShdw>
+                </a:effectLst>
+                <a:latin typeface="+mj-lt"/>
+                <a:ea typeface="+mj-ea"/>
+                <a:cs typeface="+mj-cs"/>
+              </a:defRPr>
+            </a:lvl1pPr>
+          </a:lstStyle>
+          <a:p>
+            <a:pPr algn="l"/>
+            <a:r>
+              <a:rPr lang="en-US" sz="6000" dirty="0" smtClean="0"/>
+              <a:t>The storm reveals:</a:t>
+            </a:r>
+            <a:endParaRPr lang="en-US" sz="6000" dirty="0"/>
+          </a:p>
+        </p:txBody>
+      </p:sp>
+      <p:sp>
+        <p:nvSpPr>
+          <p:cNvPr id="6" name="TextBox 5"/>
           <p:cNvSpPr txBox="1"/>
           <p:nvPr/>
         </p:nvSpPr>
         <p:spPr>
           <a:xfrm>
-            <a:off x="381000" y="1676400"/>
-            <a:ext cx="8382000" cy="3970318"/>
+            <a:off x="381000" y="2100122"/>
+            <a:ext cx="8382000" cy="2862322"/>
           </a:xfrm>
           <a:prstGeom prst="rect">
             <a:avLst/>
@@ -4376,7 +5014,7 @@
             </a:pPr>
             <a:r>
               <a:rPr lang="en-US" sz="3600" b="1" dirty="0" smtClean="0"/>
-              <a:t>Understand the storm</a:t>
+              <a:t>reveal the nature of faith</a:t>
             </a:r>
           </a:p>
           <a:p>
@@ -4386,7 +5024,7 @@
             </a:pPr>
             <a:r>
               <a:rPr lang="en-US" sz="3600" b="1" dirty="0" smtClean="0"/>
-              <a:t>is the only bird that looks for storm</a:t>
+              <a:t>reveal the strength of commitment</a:t>
             </a:r>
           </a:p>
           <a:p>
@@ -4396,7 +5034,7 @@
             </a:pPr>
             <a:r>
               <a:rPr lang="en-US" sz="3600" b="1" dirty="0" smtClean="0"/>
-              <a:t>the eagle gladly welcome the storms</a:t>
+              <a:t>reveal the level of maturity</a:t>
             </a:r>
           </a:p>
           <a:p>
@@ -4406,7 +5044,7 @@
             </a:pPr>
             <a:r>
               <a:rPr lang="en-US" sz="3600" b="1" dirty="0" smtClean="0"/>
-              <a:t>the eagle uses the storm to increase their height</a:t>
+              <a:t>reveal the health of attitude</a:t>
             </a:r>
           </a:p>
           <a:p>
@@ -4416,14 +5054,12 @@
             </a:pPr>
             <a:r>
               <a:rPr lang="en-US" sz="3600" b="1" dirty="0" smtClean="0"/>
-              <a:t>the eagle flies towards the storm</a:t>
-            </a:r>
-          </a:p>
-          <a:p>
-            <a:pPr marL="571500" indent="-571500">
-              <a:buFont typeface="Arial" pitchFamily="34" charset="0"/>
-              <a:buChar char="•"/>
-            </a:pPr>
+              <a:t>reveal the measure of </a:t>
+            </a:r>
+            <a:r>
+              <a:rPr lang="en-US" sz="3600" b="1" dirty="0" err="1" smtClean="0"/>
+              <a:t>teachability</a:t>
+            </a:r>
             <a:endParaRPr lang="en-US" sz="3600" b="1" dirty="0"/>
           </a:p>
         </p:txBody>
@@ -4431,7 +5067,7 @@
     </p:spTree>
     <p:extLst>
       <p:ext uri="{BB962C8B-B14F-4D97-AF65-F5344CB8AC3E}">
-        <p14:creationId xmlns:p14="http://schemas.microsoft.com/office/powerpoint/2010/main" val="3778602726"/>
+        <p14:creationId xmlns:p14="http://schemas.microsoft.com/office/powerpoint/2010/main" xmlns="" val="3846625994"/>
       </p:ext>
     </p:extLst>
   </p:cSld>
@@ -4465,105 +5101,7 @@
           <a:chExt cx="0" cy="0"/>
         </a:xfrm>
       </p:grpSpPr>
-      <p:sp>
-        <p:nvSpPr>
-          <p:cNvPr id="2" name="Title 1"/>
-          <p:cNvSpPr>
-            <a:spLocks noGrp="1"/>
-          </p:cNvSpPr>
-          <p:nvPr>
-            <p:ph type="title"/>
-          </p:nvPr>
-        </p:nvSpPr>
-        <p:spPr/>
-        <p:txBody>
-          <a:bodyPr/>
-          <a:lstStyle/>
-          <a:p>
-            <a:r>
-              <a:rPr lang="en-US" dirty="0" smtClean="0"/>
-              <a:t>Facing the storm like an eagle</a:t>
-            </a:r>
-            <a:endParaRPr lang="en-US" dirty="0"/>
-          </a:p>
-        </p:txBody>
-      </p:sp>
-      <p:sp>
-        <p:nvSpPr>
-          <p:cNvPr id="5" name="TextBox 4"/>
-          <p:cNvSpPr txBox="1"/>
-          <p:nvPr/>
-        </p:nvSpPr>
-        <p:spPr>
-          <a:xfrm>
-            <a:off x="381000" y="1676400"/>
-            <a:ext cx="8382000" cy="5078313"/>
-          </a:xfrm>
-          <a:prstGeom prst="rect">
-            <a:avLst/>
-          </a:prstGeom>
-          <a:noFill/>
-        </p:spPr>
-        <p:txBody>
-          <a:bodyPr wrap="square" rtlCol="0">
-            <a:spAutoFit/>
-          </a:bodyPr>
-          <a:lstStyle/>
-          <a:p>
-            <a:pPr marL="571500" indent="-571500">
-              <a:buFont typeface="Arial" pitchFamily="34" charset="0"/>
-              <a:buChar char="•"/>
-            </a:pPr>
-            <a:r>
-              <a:rPr lang="en-US" sz="3600" b="1" dirty="0" smtClean="0"/>
-              <a:t>the eagle uses the storm to cleans his feather</a:t>
-            </a:r>
-          </a:p>
-          <a:p>
-            <a:pPr marL="571500" indent="-571500">
-              <a:buFont typeface="Arial" pitchFamily="34" charset="0"/>
-              <a:buChar char="•"/>
-            </a:pPr>
-            <a:r>
-              <a:rPr lang="en-US" sz="3600" b="1" dirty="0" smtClean="0"/>
-              <a:t>the eagle uses the storm to test its pinions and bones</a:t>
-            </a:r>
-          </a:p>
-          <a:p>
-            <a:pPr marL="571500" indent="-571500">
-              <a:buFont typeface="Arial" pitchFamily="34" charset="0"/>
-              <a:buChar char="•"/>
-            </a:pPr>
-            <a:r>
-              <a:rPr lang="en-US" sz="3600" b="1" dirty="0" smtClean="0"/>
-              <a:t>the eagle uses the storm to renew his strength</a:t>
-            </a:r>
-          </a:p>
-          <a:p>
-            <a:pPr marL="571500" indent="-571500">
-              <a:buFont typeface="Arial" pitchFamily="34" charset="0"/>
-              <a:buChar char="•"/>
-            </a:pPr>
-            <a:r>
-              <a:rPr lang="en-US" sz="3600" b="1" dirty="0" smtClean="0"/>
-              <a:t>the eagle will leave the storm after using the storm</a:t>
-            </a:r>
-          </a:p>
-          <a:p>
-            <a:pPr marL="571500" indent="-571500">
-              <a:buFont typeface="Arial" pitchFamily="34" charset="0"/>
-              <a:buChar char="•"/>
-            </a:pPr>
-            <a:endParaRPr lang="en-US" sz="3600" b="1" dirty="0"/>
-          </a:p>
-        </p:txBody>
-      </p:sp>
     </p:spTree>
-    <p:extLst>
-      <p:ext uri="{BB962C8B-B14F-4D97-AF65-F5344CB8AC3E}">
-        <p14:creationId xmlns:p14="http://schemas.microsoft.com/office/powerpoint/2010/main" val="592737160"/>
-      </p:ext>
-    </p:extLst>
   </p:cSld>
   <p:clrMapOvr>
     <a:masterClrMapping/>
